--- a/python-course-ppt/逐节课件/Python讲授课件-单元07.pptx
+++ b/python-course-ppt/逐节课件/Python讲授课件-单元07.pptx
@@ -240,1716 +240,6 @@
     </a:lvl9pPr>
   </p:notesStyle>
 </p:notesMaster>
-</file>
-
-<file path=ppt/notesSlides/notesSlide1.xml><?xml version="1.0" encoding="utf-8"?>
-<p:notes xmlns:a="http://schemas.openxmlformats.org/drawingml/2006/main" xmlns:p="http://schemas.openxmlformats.org/presentationml/2006/main" xmlns:r="http://schemas.openxmlformats.org/officeDocument/2006/relationships">
-  <p:cSld>
-    <p:spTree>
-      <p:nvGrpSpPr>
-        <p:cNvPr id="1" name=""/>
-        <p:cNvGrpSpPr/>
-        <p:nvPr/>
-      </p:nvGrpSpPr>
-      <p:grpSpPr>
-        <a:xfrm>
-          <a:off x="0" y="0"/>
-          <a:ext cx="0" cy="0"/>
-          <a:chOff x="0" y="0"/>
-          <a:chExt cx="0" cy="0"/>
-        </a:xfrm>
-      </p:grpSpPr>
-      <p:sp>
-        <p:nvSpPr>
-          <p:cNvPr id="2" name="讲课提示"/>
-          <p:cNvSpPr txBox="1"/>
-          <p:nvPr/>
-        </p:nvSpPr>
-        <p:spPr>
-          <a:xfrm>
-            <a:off x="457200" y="457200"/>
-            <a:ext cx="6858000" cy="4800600"/>
-          </a:xfrm>
-          <a:prstGeom prst="rect">
-            <a:avLst/>
-          </a:prstGeom>
-        </p:spPr>
-        <p:txBody>
-          <a:bodyPr wrap="square"/>
-          <a:lstStyle/>
-          <a:p>
-            <a:r>
-              <a:rPr lang="zh-CN" dirty="0"/>
-              <a:t>单元 7 · 单元 7 · 函数</a:t>
-            </a:r>
-          </a:p>
-          <a:p>
-            <a:r>
-              <a:rPr lang="zh-CN" dirty="0"/>
-              <a:t/>
-            </a:r>
-          </a:p>
-          <a:p>
-            <a:r>
-              <a:rPr lang="zh-CN" dirty="0"/>
-              <a:t>本单元包含以下课节：</a:t>
-            </a:r>
-          </a:p>
-          <a:p>
-            <a:r>
-              <a:rPr lang="zh-CN" dirty="0"/>
-              <a:t>· 第 33 节 定义函数与 return</a:t>
-            </a:r>
-          </a:p>
-          <a:p>
-            <a:r>
-              <a:rPr lang="zh-CN" dirty="0"/>
-              <a:t>· 第 34 节 三种参数写法与★ 参数传递的副本语义</a:t>
-            </a:r>
-          </a:p>
-          <a:p>
-            <a:r>
-              <a:rPr lang="zh-CN" dirty="0"/>
-              <a:t>· 第 35 节 作用域与函数是一等公民</a:t>
-            </a:r>
-          </a:p>
-          <a:p>
-            <a:r>
-              <a:rPr lang="zh-CN" dirty="0"/>
-              <a:t>· 第 36 节 七个示例串讲与拆模块</a:t>
-            </a:r>
-          </a:p>
-          <a:p>
-            <a:r>
-              <a:rPr lang="zh-CN" dirty="0"/>
-              <a:t>· 第 37 节 动手实战与答案讲评</a:t>
-            </a:r>
-          </a:p>
-          <a:p>
-            <a:r>
-              <a:rPr lang="zh-CN" dirty="0"/>
-              <a:t>· 第 38 节 ★ 六个常见错误逐条自查</a:t>
-            </a:r>
-          </a:p>
-          <a:p>
-            <a:r>
-              <a:rPr lang="zh-CN" dirty="0"/>
-              <a:t>· 第 39 节 单元 7 验收复盘</a:t>
-            </a:r>
-          </a:p>
-          <a:p>
-            <a:r>
-              <a:rPr lang="zh-CN" dirty="0"/>
-              <a:t/>
-            </a:r>
-          </a:p>
-          <a:p>
-            <a:r>
-              <a:rPr lang="zh-CN" dirty="0"/>
-              <a:t>开场用 3 分钟讲清：这个单元学完能做出什么，最后会被关卡怎么验。</a:t>
-            </a:r>
-          </a:p>
-        </p:txBody>
-      </p:sp>
-    </p:spTree>
-  </p:cSld>
-  <p:clrMapOvr>
-    <a:masterClrMapping/>
-  </p:clrMapOvr>
-</p:notes>
-</file>
-
-<file path=ppt/notesSlides/notesSlide10.xml><?xml version="1.0" encoding="utf-8"?>
-<p:notes xmlns:a="http://schemas.openxmlformats.org/drawingml/2006/main" xmlns:p="http://schemas.openxmlformats.org/presentationml/2006/main" xmlns:r="http://schemas.openxmlformats.org/officeDocument/2006/relationships">
-  <p:cSld>
-    <p:spTree>
-      <p:nvGrpSpPr>
-        <p:cNvPr id="1" name=""/>
-        <p:cNvGrpSpPr/>
-        <p:nvPr/>
-      </p:nvGrpSpPr>
-      <p:grpSpPr>
-        <a:xfrm>
-          <a:off x="0" y="0"/>
-          <a:ext cx="0" cy="0"/>
-          <a:chOff x="0" y="0"/>
-          <a:chExt cx="0" cy="0"/>
-        </a:xfrm>
-      </p:grpSpPr>
-      <p:sp>
-        <p:nvSpPr>
-          <p:cNvPr id="2" name="讲课提示"/>
-          <p:cNvSpPr txBox="1"/>
-          <p:nvPr/>
-        </p:nvSpPr>
-        <p:spPr>
-          <a:xfrm>
-            <a:off x="457200" y="457200"/>
-            <a:ext cx="6858000" cy="4800600"/>
-          </a:xfrm>
-          <a:prstGeom prst="rect">
-            <a:avLst/>
-          </a:prstGeom>
-        </p:spPr>
-        <p:txBody>
-          <a:bodyPr wrap="square"/>
-          <a:lstStyle/>
-          <a:p>
-            <a:r>
-              <a:rPr lang="zh-CN" dirty="0"/>
-              <a:t>第 37 节 · 动手实战与答案讲评</a:t>
-            </a:r>
-          </a:p>
-          <a:p>
-            <a:r>
-              <a:rPr lang="zh-CN" dirty="0"/>
-              <a:t>单元 7 · 函数 · W7–W8</a:t>
-            </a:r>
-          </a:p>
-          <a:p>
-            <a:r>
-              <a:rPr lang="zh-CN" dirty="0"/>
-              <a:t/>
-            </a:r>
-          </a:p>
-          <a:p>
-            <a:r>
-              <a:rPr lang="zh-CN" dirty="0"/>
-              <a:t>学习目标：独立完成单元 7 练习，掌握用函数重构代码</a:t>
-            </a:r>
-          </a:p>
-          <a:p>
-            <a:r>
-              <a:rPr lang="zh-CN" dirty="0"/>
-              <a:t/>
-            </a:r>
-          </a:p>
-          <a:p>
-            <a:r>
-              <a:rPr lang="zh-CN" dirty="0"/>
-              <a:t>课堂实操（40 分钟，不看答案）：</a:t>
-            </a:r>
-          </a:p>
-          <a:p>
-            <a:r>
-              <a:rPr lang="zh-CN" dirty="0"/>
-              <a:t>· 限时 30 分钟独立完成基础档</a:t>
-            </a:r>
-          </a:p>
-          <a:p>
-            <a:r>
-              <a:rPr lang="zh-CN" dirty="0"/>
-              <a:t>· 逐题对照答案讲评</a:t>
-            </a:r>
-          </a:p>
-          <a:p>
-            <a:r>
-              <a:rPr lang="zh-CN" dirty="0"/>
-              <a:t/>
-            </a:r>
-          </a:p>
-          <a:p>
-            <a:r>
-              <a:rPr lang="zh-CN" dirty="0"/>
-              <a:t>课后作业：</a:t>
-            </a:r>
-          </a:p>
-          <a:p>
-            <a:r>
-              <a:rPr lang="zh-CN" dirty="0"/>
-              <a:t>· ★ 动手项目 8.1–8.3 魔方消息 + 8.4–8.6 星际争霸 + 8.7 鸡尾酒</a:t>
-            </a:r>
-          </a:p>
-          <a:p>
-            <a:r>
-              <a:rPr lang="zh-CN" dirty="0"/>
-              <a:t>· 产出：3 个可复用函数 + 2 个自定义模块</a:t>
-            </a:r>
-          </a:p>
-          <a:p>
-            <a:r>
-              <a:rPr lang="zh-CN" dirty="0"/>
-              <a:t/>
-            </a:r>
-          </a:p>
-          <a:p>
-            <a:r>
-              <a:rPr lang="zh-CN" dirty="0"/>
-              <a:t>节奏：讲 20 分钟 → 学员自己敲 40 分钟（不看答案）→ 对讲评自查 20 分钟 → 写作业 10 分钟。</a:t>
-            </a:r>
-          </a:p>
-        </p:txBody>
-      </p:sp>
-    </p:spTree>
-  </p:cSld>
-  <p:clrMapOvr>
-    <a:masterClrMapping/>
-  </p:clrMapOvr>
-</p:notes>
-</file>
-
-<file path=ppt/notesSlides/notesSlide11.xml><?xml version="1.0" encoding="utf-8"?>
-<p:notes xmlns:a="http://schemas.openxmlformats.org/drawingml/2006/main" xmlns:p="http://schemas.openxmlformats.org/presentationml/2006/main" xmlns:r="http://schemas.openxmlformats.org/officeDocument/2006/relationships">
-  <p:cSld>
-    <p:spTree>
-      <p:nvGrpSpPr>
-        <p:cNvPr id="1" name=""/>
-        <p:cNvGrpSpPr/>
-        <p:nvPr/>
-      </p:nvGrpSpPr>
-      <p:grpSpPr>
-        <a:xfrm>
-          <a:off x="0" y="0"/>
-          <a:ext cx="0" cy="0"/>
-          <a:chOff x="0" y="0"/>
-          <a:chExt cx="0" cy="0"/>
-        </a:xfrm>
-      </p:grpSpPr>
-      <p:sp>
-        <p:nvSpPr>
-          <p:cNvPr id="2" name="讲课提示"/>
-          <p:cNvSpPr txBox="1"/>
-          <p:nvPr/>
-        </p:nvSpPr>
-        <p:spPr>
-          <a:xfrm>
-            <a:off x="457200" y="457200"/>
-            <a:ext cx="6858000" cy="4800600"/>
-          </a:xfrm>
-          <a:prstGeom prst="rect">
-            <a:avLst/>
-          </a:prstGeom>
-        </p:spPr>
-        <p:txBody>
-          <a:bodyPr wrap="square"/>
-          <a:lstStyle/>
-          <a:p>
-            <a:r>
-              <a:rPr lang="zh-CN" dirty="0"/>
-              <a:t>第 37 节 · 核心知识点：动手实战与答案讲评</a:t>
-            </a:r>
-          </a:p>
-          <a:p>
-            <a:r>
-              <a:rPr lang="zh-CN" dirty="0"/>
-              <a:t/>
-            </a:r>
-          </a:p>
-          <a:p>
-            <a:r>
-              <a:rPr lang="zh-CN" dirty="0"/>
-              <a:t>讲这一页时：先让学生说出上节课的结论，再逐块讲要点。</a:t>
-            </a:r>
-          </a:p>
-          <a:p>
-            <a:r>
-              <a:rPr lang="zh-CN" dirty="0"/>
-              <a:t>每讲完一块，问一句「这一步如果写错了，报错会长什么样？」——把错误提前讲。</a:t>
-            </a:r>
-          </a:p>
-          <a:p>
-            <a:r>
-              <a:rPr lang="zh-CN" dirty="0"/>
-              <a:t/>
-            </a:r>
-          </a:p>
-          <a:p>
-            <a:r>
-              <a:rPr lang="zh-CN" dirty="0"/>
-              <a:t>本节目标：独立完成单元 7 练习，掌握用函数重构代码</a:t>
-            </a:r>
-          </a:p>
-          <a:p>
-            <a:r>
-              <a:rPr lang="zh-CN" dirty="0"/>
-              <a:t/>
-            </a:r>
-          </a:p>
-          <a:p>
-            <a:r>
-              <a:rPr lang="zh-CN" dirty="0"/>
-              <a:t>看不到懂的地方，回讲义对应小节读一遍，再回来对着这页复述一次——能讲出来才算真懂。</a:t>
-            </a:r>
-          </a:p>
-        </p:txBody>
-      </p:sp>
-    </p:spTree>
-  </p:cSld>
-  <p:clrMapOvr>
-    <a:masterClrMapping/>
-  </p:clrMapOvr>
-</p:notes>
-</file>
-
-<file path=ppt/notesSlides/notesSlide12.xml><?xml version="1.0" encoding="utf-8"?>
-<p:notes xmlns:a="http://schemas.openxmlformats.org/drawingml/2006/main" xmlns:p="http://schemas.openxmlformats.org/presentationml/2006/main" xmlns:r="http://schemas.openxmlformats.org/officeDocument/2006/relationships">
-  <p:cSld>
-    <p:spTree>
-      <p:nvGrpSpPr>
-        <p:cNvPr id="1" name=""/>
-        <p:cNvGrpSpPr/>
-        <p:nvPr/>
-      </p:nvGrpSpPr>
-      <p:grpSpPr>
-        <a:xfrm>
-          <a:off x="0" y="0"/>
-          <a:ext cx="0" cy="0"/>
-          <a:chOff x="0" y="0"/>
-          <a:chExt cx="0" cy="0"/>
-        </a:xfrm>
-      </p:grpSpPr>
-      <p:sp>
-        <p:nvSpPr>
-          <p:cNvPr id="2" name="讲课提示"/>
-          <p:cNvSpPr txBox="1"/>
-          <p:nvPr/>
-        </p:nvSpPr>
-        <p:spPr>
-          <a:xfrm>
-            <a:off x="457200" y="457200"/>
-            <a:ext cx="6858000" cy="4800600"/>
-          </a:xfrm>
-          <a:prstGeom prst="rect">
-            <a:avLst/>
-          </a:prstGeom>
-        </p:spPr>
-        <p:txBody>
-          <a:bodyPr wrap="square"/>
-          <a:lstStyle/>
-          <a:p>
-            <a:r>
-              <a:rPr lang="zh-CN" dirty="0"/>
-              <a:t>第 38 节 · ★ 六个常见错误逐条自查</a:t>
-            </a:r>
-          </a:p>
-          <a:p>
-            <a:r>
-              <a:rPr lang="zh-CN" dirty="0"/>
-              <a:t>单元 7 · 函数 · W7–W8</a:t>
-            </a:r>
-          </a:p>
-          <a:p>
-            <a:r>
-              <a:rPr lang="zh-CN" dirty="0"/>
-              <a:t/>
-            </a:r>
-          </a:p>
-          <a:p>
-            <a:r>
-              <a:rPr lang="zh-CN" dirty="0"/>
-              <a:t>学习目标：能对照错误清单逐条自查，把函数相关的坑全部避开</a:t>
-            </a:r>
-          </a:p>
-          <a:p>
-            <a:r>
-              <a:rPr lang="zh-CN" dirty="0"/>
-              <a:t/>
-            </a:r>
-          </a:p>
-          <a:p>
-            <a:r>
-              <a:rPr lang="zh-CN" dirty="0"/>
-              <a:t>课堂实操（40 分钟，不看答案）：</a:t>
-            </a:r>
-          </a:p>
-          <a:p>
-            <a:r>
-              <a:rPr lang="zh-CN" dirty="0"/>
-              <a:t>· 逐条现场制造并修复 6 个错误</a:t>
-            </a:r>
-          </a:p>
-          <a:p>
-            <a:r>
-              <a:rPr lang="zh-CN" dirty="0"/>
-              <a:t>· 重点讲透「默认参数用了可变对象」</a:t>
-            </a:r>
-          </a:p>
-          <a:p>
-            <a:r>
-              <a:rPr lang="zh-CN" dirty="0"/>
-              <a:t/>
-            </a:r>
-          </a:p>
-          <a:p>
-            <a:r>
-              <a:rPr lang="zh-CN" dirty="0"/>
-              <a:t>课后作业：</a:t>
-            </a:r>
-          </a:p>
-          <a:p>
-            <a:r>
-              <a:rPr lang="zh-CN" dirty="0"/>
-              <a:t>· 把 6 个错误各写一个最小复现</a:t>
-            </a:r>
-          </a:p>
-          <a:p>
-            <a:r>
-              <a:rPr lang="zh-CN" dirty="0"/>
-              <a:t/>
-            </a:r>
-          </a:p>
-          <a:p>
-            <a:r>
-              <a:rPr lang="zh-CN" dirty="0"/>
-              <a:t>节奏：讲 20 分钟 → 学员自己敲 40 分钟（不看答案）→ 对讲评自查 20 分钟 → 写作业 10 分钟。</a:t>
-            </a:r>
-          </a:p>
-        </p:txBody>
-      </p:sp>
-    </p:spTree>
-  </p:cSld>
-  <p:clrMapOvr>
-    <a:masterClrMapping/>
-  </p:clrMapOvr>
-</p:notes>
-</file>
-
-<file path=ppt/notesSlides/notesSlide13.xml><?xml version="1.0" encoding="utf-8"?>
-<p:notes xmlns:a="http://schemas.openxmlformats.org/drawingml/2006/main" xmlns:p="http://schemas.openxmlformats.org/presentationml/2006/main" xmlns:r="http://schemas.openxmlformats.org/officeDocument/2006/relationships">
-  <p:cSld>
-    <p:spTree>
-      <p:nvGrpSpPr>
-        <p:cNvPr id="1" name=""/>
-        <p:cNvGrpSpPr/>
-        <p:nvPr/>
-      </p:nvGrpSpPr>
-      <p:grpSpPr>
-        <a:xfrm>
-          <a:off x="0" y="0"/>
-          <a:ext cx="0" cy="0"/>
-          <a:chOff x="0" y="0"/>
-          <a:chExt cx="0" cy="0"/>
-        </a:xfrm>
-      </p:grpSpPr>
-      <p:sp>
-        <p:nvSpPr>
-          <p:cNvPr id="2" name="讲课提示"/>
-          <p:cNvSpPr txBox="1"/>
-          <p:nvPr/>
-        </p:nvSpPr>
-        <p:spPr>
-          <a:xfrm>
-            <a:off x="457200" y="457200"/>
-            <a:ext cx="6858000" cy="4800600"/>
-          </a:xfrm>
-          <a:prstGeom prst="rect">
-            <a:avLst/>
-          </a:prstGeom>
-        </p:spPr>
-        <p:txBody>
-          <a:bodyPr wrap="square"/>
-          <a:lstStyle/>
-          <a:p>
-            <a:r>
-              <a:rPr lang="zh-CN" dirty="0"/>
-              <a:t>第 38 节 · 核心知识点：★ 六个常见错误逐条自查</a:t>
-            </a:r>
-          </a:p>
-          <a:p>
-            <a:r>
-              <a:rPr lang="zh-CN" dirty="0"/>
-              <a:t/>
-            </a:r>
-          </a:p>
-          <a:p>
-            <a:r>
-              <a:rPr lang="zh-CN" dirty="0"/>
-              <a:t>讲这一页时：先让学生说出上节课的结论，再逐块讲要点。</a:t>
-            </a:r>
-          </a:p>
-          <a:p>
-            <a:r>
-              <a:rPr lang="zh-CN" dirty="0"/>
-              <a:t>每讲完一块，问一句「这一步如果写错了，报错会长什么样？」——把错误提前讲。</a:t>
-            </a:r>
-          </a:p>
-          <a:p>
-            <a:r>
-              <a:rPr lang="zh-CN" dirty="0"/>
-              <a:t/>
-            </a:r>
-          </a:p>
-          <a:p>
-            <a:r>
-              <a:rPr lang="zh-CN" dirty="0"/>
-              <a:t>本节目标：能对照错误清单逐条自查，把函数相关的坑全部避开</a:t>
-            </a:r>
-          </a:p>
-          <a:p>
-            <a:r>
-              <a:rPr lang="zh-CN" dirty="0"/>
-              <a:t/>
-            </a:r>
-          </a:p>
-          <a:p>
-            <a:r>
-              <a:rPr lang="zh-CN" dirty="0"/>
-              <a:t>看不到懂的地方，回讲义对应小节读一遍，再回来对着这页复述一次——能讲出来才算真懂。</a:t>
-            </a:r>
-          </a:p>
-        </p:txBody>
-      </p:sp>
-    </p:spTree>
-  </p:cSld>
-  <p:clrMapOvr>
-    <a:masterClrMapping/>
-  </p:clrMapOvr>
-</p:notes>
-</file>
-
-<file path=ppt/notesSlides/notesSlide14.xml><?xml version="1.0" encoding="utf-8"?>
-<p:notes xmlns:a="http://schemas.openxmlformats.org/drawingml/2006/main" xmlns:p="http://schemas.openxmlformats.org/presentationml/2006/main" xmlns:r="http://schemas.openxmlformats.org/officeDocument/2006/relationships">
-  <p:cSld>
-    <p:spTree>
-      <p:nvGrpSpPr>
-        <p:cNvPr id="1" name=""/>
-        <p:cNvGrpSpPr/>
-        <p:nvPr/>
-      </p:nvGrpSpPr>
-      <p:grpSpPr>
-        <a:xfrm>
-          <a:off x="0" y="0"/>
-          <a:ext cx="0" cy="0"/>
-          <a:chOff x="0" y="0"/>
-          <a:chExt cx="0" cy="0"/>
-        </a:xfrm>
-      </p:grpSpPr>
-      <p:sp>
-        <p:nvSpPr>
-          <p:cNvPr id="2" name="讲课提示"/>
-          <p:cNvSpPr txBox="1"/>
-          <p:nvPr/>
-        </p:nvSpPr>
-        <p:spPr>
-          <a:xfrm>
-            <a:off x="457200" y="457200"/>
-            <a:ext cx="6858000" cy="4800600"/>
-          </a:xfrm>
-          <a:prstGeom prst="rect">
-            <a:avLst/>
-          </a:prstGeom>
-        </p:spPr>
-        <p:txBody>
-          <a:bodyPr wrap="square"/>
-          <a:lstStyle/>
-          <a:p>
-            <a:r>
-              <a:rPr lang="zh-CN" dirty="0"/>
-              <a:t>第 39 节 · 单元 7 验收复盘</a:t>
-            </a:r>
-          </a:p>
-          <a:p>
-            <a:r>
-              <a:rPr lang="zh-CN" dirty="0"/>
-              <a:t>单元 7 · 函数 · W7–W8</a:t>
-            </a:r>
-          </a:p>
-          <a:p>
-            <a:r>
-              <a:rPr lang="zh-CN" dirty="0"/>
-              <a:t/>
-            </a:r>
-          </a:p>
-          <a:p>
-            <a:r>
-              <a:rPr lang="zh-CN" dirty="0"/>
-              <a:t>学习目标：确认函数定义、参数、返回值、作用域、导入都过关</a:t>
-            </a:r>
-          </a:p>
-          <a:p>
-            <a:r>
-              <a:rPr lang="zh-CN" dirty="0"/>
-              <a:t/>
-            </a:r>
-          </a:p>
-          <a:p>
-            <a:r>
-              <a:rPr lang="zh-CN" dirty="0"/>
-              <a:t>课堂实操（40 分钟，不看答案）：</a:t>
-            </a:r>
-          </a:p>
-          <a:p>
-            <a:r>
-              <a:rPr lang="zh-CN" dirty="0"/>
-              <a:t>· 逐条打勾验收自测</a:t>
-            </a:r>
-          </a:p>
-          <a:p>
-            <a:r>
-              <a:rPr lang="zh-CN" dirty="0"/>
-              <a:t>· 现场把一段 30 行代码拆成 3 个函数</a:t>
-            </a:r>
-          </a:p>
-          <a:p>
-            <a:r>
-              <a:rPr lang="zh-CN" dirty="0"/>
-              <a:t/>
-            </a:r>
-          </a:p>
-          <a:p>
-            <a:r>
-              <a:rPr lang="zh-CN" dirty="0"/>
-              <a:t>课后作业：</a:t>
-            </a:r>
-          </a:p>
-          <a:p>
-            <a:r>
-              <a:rPr lang="zh-CN" dirty="0"/>
-              <a:t>· 完成本单元小结与产出检查</a:t>
-            </a:r>
-          </a:p>
-          <a:p>
-            <a:r>
-              <a:rPr lang="zh-CN" dirty="0"/>
-              <a:t/>
-            </a:r>
-          </a:p>
-          <a:p>
-            <a:r>
-              <a:rPr lang="zh-CN" dirty="0"/>
-              <a:t>节奏：讲 20 分钟 → 学员自己敲 40 分钟（不看答案）→ 对讲评自查 20 分钟 → 写作业 10 分钟。</a:t>
-            </a:r>
-          </a:p>
-        </p:txBody>
-      </p:sp>
-    </p:spTree>
-  </p:cSld>
-  <p:clrMapOvr>
-    <a:masterClrMapping/>
-  </p:clrMapOvr>
-</p:notes>
-</file>
-
-<file path=ppt/notesSlides/notesSlide15.xml><?xml version="1.0" encoding="utf-8"?>
-<p:notes xmlns:a="http://schemas.openxmlformats.org/drawingml/2006/main" xmlns:p="http://schemas.openxmlformats.org/presentationml/2006/main" xmlns:r="http://schemas.openxmlformats.org/officeDocument/2006/relationships">
-  <p:cSld>
-    <p:spTree>
-      <p:nvGrpSpPr>
-        <p:cNvPr id="1" name=""/>
-        <p:cNvGrpSpPr/>
-        <p:nvPr/>
-      </p:nvGrpSpPr>
-      <p:grpSpPr>
-        <a:xfrm>
-          <a:off x="0" y="0"/>
-          <a:ext cx="0" cy="0"/>
-          <a:chOff x="0" y="0"/>
-          <a:chExt cx="0" cy="0"/>
-        </a:xfrm>
-      </p:grpSpPr>
-      <p:sp>
-        <p:nvSpPr>
-          <p:cNvPr id="2" name="讲课提示"/>
-          <p:cNvSpPr txBox="1"/>
-          <p:nvPr/>
-        </p:nvSpPr>
-        <p:spPr>
-          <a:xfrm>
-            <a:off x="457200" y="457200"/>
-            <a:ext cx="6858000" cy="4800600"/>
-          </a:xfrm>
-          <a:prstGeom prst="rect">
-            <a:avLst/>
-          </a:prstGeom>
-        </p:spPr>
-        <p:txBody>
-          <a:bodyPr wrap="square"/>
-          <a:lstStyle/>
-          <a:p>
-            <a:r>
-              <a:rPr lang="zh-CN" dirty="0"/>
-              <a:t>第 39 节 · 核心知识点：单元 7 验收复盘</a:t>
-            </a:r>
-          </a:p>
-          <a:p>
-            <a:r>
-              <a:rPr lang="zh-CN" dirty="0"/>
-              <a:t/>
-            </a:r>
-          </a:p>
-          <a:p>
-            <a:r>
-              <a:rPr lang="zh-CN" dirty="0"/>
-              <a:t>讲这一页时：先让学生说出上节课的结论，再逐块讲要点。</a:t>
-            </a:r>
-          </a:p>
-          <a:p>
-            <a:r>
-              <a:rPr lang="zh-CN" dirty="0"/>
-              <a:t>每讲完一块，问一句「这一步如果写错了，报错会长什么样？」——把错误提前讲。</a:t>
-            </a:r>
-          </a:p>
-          <a:p>
-            <a:r>
-              <a:rPr lang="zh-CN" dirty="0"/>
-              <a:t/>
-            </a:r>
-          </a:p>
-          <a:p>
-            <a:r>
-              <a:rPr lang="zh-CN" dirty="0"/>
-              <a:t>本节目标：确认函数定义、参数、返回值、作用域、导入都过关</a:t>
-            </a:r>
-          </a:p>
-          <a:p>
-            <a:r>
-              <a:rPr lang="zh-CN" dirty="0"/>
-              <a:t/>
-            </a:r>
-          </a:p>
-          <a:p>
-            <a:r>
-              <a:rPr lang="zh-CN" dirty="0"/>
-              <a:t>看不到懂的地方，回讲义对应小节读一遍，再回来对着这页复述一次——能讲出来才算真懂。</a:t>
-            </a:r>
-          </a:p>
-        </p:txBody>
-      </p:sp>
-    </p:spTree>
-  </p:cSld>
-  <p:clrMapOvr>
-    <a:masterClrMapping/>
-  </p:clrMapOvr>
-</p:notes>
-</file>
-
-<file path=ppt/notesSlides/notesSlide16.xml><?xml version="1.0" encoding="utf-8"?>
-<p:notes xmlns:a="http://schemas.openxmlformats.org/drawingml/2006/main" xmlns:p="http://schemas.openxmlformats.org/presentationml/2006/main" xmlns:r="http://schemas.openxmlformats.org/officeDocument/2006/relationships">
-  <p:cSld>
-    <p:spTree>
-      <p:nvGrpSpPr>
-        <p:cNvPr id="1" name=""/>
-        <p:cNvGrpSpPr/>
-        <p:nvPr/>
-      </p:nvGrpSpPr>
-      <p:grpSpPr>
-        <a:xfrm>
-          <a:off x="0" y="0"/>
-          <a:ext cx="0" cy="0"/>
-          <a:chOff x="0" y="0"/>
-          <a:chExt cx="0" cy="0"/>
-        </a:xfrm>
-      </p:grpSpPr>
-      <p:sp>
-        <p:nvSpPr>
-          <p:cNvPr id="2" name="讲课提示"/>
-          <p:cNvSpPr txBox="1"/>
-          <p:nvPr/>
-        </p:nvSpPr>
-        <p:spPr>
-          <a:xfrm>
-            <a:off x="457200" y="457200"/>
-            <a:ext cx="6858000" cy="4800600"/>
-          </a:xfrm>
-          <a:prstGeom prst="rect">
-            <a:avLst/>
-          </a:prstGeom>
-        </p:spPr>
-        <p:txBody>
-          <a:bodyPr wrap="square"/>
-          <a:lstStyle/>
-          <a:p>
-            <a:r>
-              <a:rPr lang="zh-CN" dirty="0"/>
-              <a:t>单元 7 小结 · 单元 7 · 小结</a:t>
-            </a:r>
-          </a:p>
-          <a:p>
-            <a:r>
-              <a:rPr lang="zh-CN" dirty="0"/>
-              <a:t/>
-            </a:r>
-          </a:p>
-          <a:p>
-            <a:r>
-              <a:rPr lang="zh-CN" dirty="0"/>
-              <a:t>收尾动作：让学生合上讲义，口述本单元三个最重要的结论；说不出来的，回对应课节。</a:t>
-            </a:r>
-          </a:p>
-          <a:p>
-            <a:r>
-              <a:rPr lang="zh-CN" dirty="0"/>
-              <a:t>然后当场勾一遍本单元课节的「已完成」，没打勾的进下一单元前补掉。</a:t>
-            </a:r>
-          </a:p>
-        </p:txBody>
-      </p:sp>
-    </p:spTree>
-  </p:cSld>
-  <p:clrMapOvr>
-    <a:masterClrMapping/>
-  </p:clrMapOvr>
-</p:notes>
-</file>
-
-<file path=ppt/notesSlides/notesSlide2.xml><?xml version="1.0" encoding="utf-8"?>
-<p:notes xmlns:a="http://schemas.openxmlformats.org/drawingml/2006/main" xmlns:p="http://schemas.openxmlformats.org/presentationml/2006/main" xmlns:r="http://schemas.openxmlformats.org/officeDocument/2006/relationships">
-  <p:cSld>
-    <p:spTree>
-      <p:nvGrpSpPr>
-        <p:cNvPr id="1" name=""/>
-        <p:cNvGrpSpPr/>
-        <p:nvPr/>
-      </p:nvGrpSpPr>
-      <p:grpSpPr>
-        <a:xfrm>
-          <a:off x="0" y="0"/>
-          <a:ext cx="0" cy="0"/>
-          <a:chOff x="0" y="0"/>
-          <a:chExt cx="0" cy="0"/>
-        </a:xfrm>
-      </p:grpSpPr>
-      <p:sp>
-        <p:nvSpPr>
-          <p:cNvPr id="2" name="讲课提示"/>
-          <p:cNvSpPr txBox="1"/>
-          <p:nvPr/>
-        </p:nvSpPr>
-        <p:spPr>
-          <a:xfrm>
-            <a:off x="457200" y="457200"/>
-            <a:ext cx="6858000" cy="4800600"/>
-          </a:xfrm>
-          <a:prstGeom prst="rect">
-            <a:avLst/>
-          </a:prstGeom>
-        </p:spPr>
-        <p:txBody>
-          <a:bodyPr wrap="square"/>
-          <a:lstStyle/>
-          <a:p>
-            <a:r>
-              <a:rPr lang="zh-CN" dirty="0"/>
-              <a:t>第 33 节 · 定义函数与 return</a:t>
-            </a:r>
-          </a:p>
-          <a:p>
-            <a:r>
-              <a:rPr lang="zh-CN" dirty="0"/>
-              <a:t>单元 7 · 函数 · W7</a:t>
-            </a:r>
-          </a:p>
-          <a:p>
-            <a:r>
-              <a:rPr lang="zh-CN" dirty="0"/>
-              <a:t/>
-            </a:r>
-          </a:p>
-          <a:p>
-            <a:r>
-              <a:rPr lang="zh-CN" dirty="0"/>
-              <a:t>学习目标：理解函数是「给一段代码起名字」，知道 return 才是真正的输出</a:t>
-            </a:r>
-          </a:p>
-          <a:p>
-            <a:r>
-              <a:rPr lang="zh-CN" dirty="0"/>
-              <a:t/>
-            </a:r>
-          </a:p>
-          <a:p>
-            <a:r>
-              <a:rPr lang="zh-CN" dirty="0"/>
-              <a:t>课堂实操（40 分钟，不看答案）：</a:t>
-            </a:r>
-          </a:p>
-          <a:p>
-            <a:r>
-              <a:rPr lang="zh-CN" dirty="0"/>
-              <a:t>· 把一段 10 行重复代码抽成一个函数</a:t>
-            </a:r>
-          </a:p>
-          <a:p>
-            <a:r>
-              <a:rPr lang="zh-CN" dirty="0"/>
-              <a:t>· 故意忘记 return，看函数返回什么</a:t>
-            </a:r>
-          </a:p>
-          <a:p>
-            <a:r>
-              <a:rPr lang="zh-CN" dirty="0"/>
-              <a:t/>
-            </a:r>
-          </a:p>
-          <a:p>
-            <a:r>
-              <a:rPr lang="zh-CN" dirty="0"/>
-              <a:t>课后作业：</a:t>
-            </a:r>
-          </a:p>
-          <a:p>
-            <a:r>
-              <a:rPr lang="zh-CN" dirty="0"/>
-              <a:t>· 完成动手练习 7-1 ~ 7-2</a:t>
-            </a:r>
-          </a:p>
-          <a:p>
-            <a:r>
-              <a:rPr lang="zh-CN" dirty="0"/>
-              <a:t/>
-            </a:r>
-          </a:p>
-          <a:p>
-            <a:r>
-              <a:rPr lang="zh-CN" dirty="0"/>
-              <a:t>节奏：讲 20 分钟 → 学员自己敲 40 分钟（不看答案）→ 对讲评自查 20 分钟 → 写作业 10 分钟。</a:t>
-            </a:r>
-          </a:p>
-        </p:txBody>
-      </p:sp>
-    </p:spTree>
-  </p:cSld>
-  <p:clrMapOvr>
-    <a:masterClrMapping/>
-  </p:clrMapOvr>
-</p:notes>
-</file>
-
-<file path=ppt/notesSlides/notesSlide3.xml><?xml version="1.0" encoding="utf-8"?>
-<p:notes xmlns:a="http://schemas.openxmlformats.org/drawingml/2006/main" xmlns:p="http://schemas.openxmlformats.org/presentationml/2006/main" xmlns:r="http://schemas.openxmlformats.org/officeDocument/2006/relationships">
-  <p:cSld>
-    <p:spTree>
-      <p:nvGrpSpPr>
-        <p:cNvPr id="1" name=""/>
-        <p:cNvGrpSpPr/>
-        <p:nvPr/>
-      </p:nvGrpSpPr>
-      <p:grpSpPr>
-        <a:xfrm>
-          <a:off x="0" y="0"/>
-          <a:ext cx="0" cy="0"/>
-          <a:chOff x="0" y="0"/>
-          <a:chExt cx="0" cy="0"/>
-        </a:xfrm>
-      </p:grpSpPr>
-      <p:sp>
-        <p:nvSpPr>
-          <p:cNvPr id="2" name="讲课提示"/>
-          <p:cNvSpPr txBox="1"/>
-          <p:nvPr/>
-        </p:nvSpPr>
-        <p:spPr>
-          <a:xfrm>
-            <a:off x="457200" y="457200"/>
-            <a:ext cx="6858000" cy="4800600"/>
-          </a:xfrm>
-          <a:prstGeom prst="rect">
-            <a:avLst/>
-          </a:prstGeom>
-        </p:spPr>
-        <p:txBody>
-          <a:bodyPr wrap="square"/>
-          <a:lstStyle/>
-          <a:p>
-            <a:r>
-              <a:rPr lang="zh-CN" dirty="0"/>
-              <a:t>第 33 节 · 核心知识点：定义函数与 return</a:t>
-            </a:r>
-          </a:p>
-          <a:p>
-            <a:r>
-              <a:rPr lang="zh-CN" dirty="0"/>
-              <a:t/>
-            </a:r>
-          </a:p>
-          <a:p>
-            <a:r>
-              <a:rPr lang="zh-CN" dirty="0"/>
-              <a:t>讲这一页时：先让学生说出上节课的结论，再逐块讲要点。</a:t>
-            </a:r>
-          </a:p>
-          <a:p>
-            <a:r>
-              <a:rPr lang="zh-CN" dirty="0"/>
-              <a:t>每讲完一块，问一句「这一步如果写错了，报错会长什么样？」——把错误提前讲。</a:t>
-            </a:r>
-          </a:p>
-          <a:p>
-            <a:r>
-              <a:rPr lang="zh-CN" dirty="0"/>
-              <a:t/>
-            </a:r>
-          </a:p>
-          <a:p>
-            <a:r>
-              <a:rPr lang="zh-CN" dirty="0"/>
-              <a:t>本节目标：理解函数是「给一段代码起名字」，知道 return 才是真正的输出</a:t>
-            </a:r>
-          </a:p>
-          <a:p>
-            <a:r>
-              <a:rPr lang="zh-CN" dirty="0"/>
-              <a:t/>
-            </a:r>
-          </a:p>
-          <a:p>
-            <a:r>
-              <a:rPr lang="zh-CN" dirty="0"/>
-              <a:t>看不到懂的地方，回讲义对应小节读一遍，再回来对着这页复述一次——能讲出来才算真懂。</a:t>
-            </a:r>
-          </a:p>
-        </p:txBody>
-      </p:sp>
-    </p:spTree>
-  </p:cSld>
-  <p:clrMapOvr>
-    <a:masterClrMapping/>
-  </p:clrMapOvr>
-</p:notes>
-</file>
-
-<file path=ppt/notesSlides/notesSlide4.xml><?xml version="1.0" encoding="utf-8"?>
-<p:notes xmlns:a="http://schemas.openxmlformats.org/drawingml/2006/main" xmlns:p="http://schemas.openxmlformats.org/presentationml/2006/main" xmlns:r="http://schemas.openxmlformats.org/officeDocument/2006/relationships">
-  <p:cSld>
-    <p:spTree>
-      <p:nvGrpSpPr>
-        <p:cNvPr id="1" name=""/>
-        <p:cNvGrpSpPr/>
-        <p:nvPr/>
-      </p:nvGrpSpPr>
-      <p:grpSpPr>
-        <a:xfrm>
-          <a:off x="0" y="0"/>
-          <a:ext cx="0" cy="0"/>
-          <a:chOff x="0" y="0"/>
-          <a:chExt cx="0" cy="0"/>
-        </a:xfrm>
-      </p:grpSpPr>
-      <p:sp>
-        <p:nvSpPr>
-          <p:cNvPr id="2" name="讲课提示"/>
-          <p:cNvSpPr txBox="1"/>
-          <p:nvPr/>
-        </p:nvSpPr>
-        <p:spPr>
-          <a:xfrm>
-            <a:off x="457200" y="457200"/>
-            <a:ext cx="6858000" cy="4800600"/>
-          </a:xfrm>
-          <a:prstGeom prst="rect">
-            <a:avLst/>
-          </a:prstGeom>
-        </p:spPr>
-        <p:txBody>
-          <a:bodyPr wrap="square"/>
-          <a:lstStyle/>
-          <a:p>
-            <a:r>
-              <a:rPr lang="zh-CN" dirty="0"/>
-              <a:t>第 34 节 · 三种参数写法与★ 参数传递的副本语义</a:t>
-            </a:r>
-          </a:p>
-          <a:p>
-            <a:r>
-              <a:rPr lang="zh-CN" dirty="0"/>
-              <a:t>单元 7 · 函数 · W7</a:t>
-            </a:r>
-          </a:p>
-          <a:p>
-            <a:r>
-              <a:rPr lang="zh-CN" dirty="0"/>
-              <a:t/>
-            </a:r>
-          </a:p>
-          <a:p>
-            <a:r>
-              <a:rPr lang="zh-CN" dirty="0"/>
-              <a:t>学习目标：掌握位置 / 关键字 / 默认值三种写法；理解传列表会改到原列表</a:t>
-            </a:r>
-          </a:p>
-          <a:p>
-            <a:r>
-              <a:rPr lang="zh-CN" dirty="0"/>
-              <a:t/>
-            </a:r>
-          </a:p>
-          <a:p>
-            <a:r>
-              <a:rPr lang="zh-CN" dirty="0"/>
-              <a:t>课堂实操（40 分钟，不看答案）：</a:t>
-            </a:r>
-          </a:p>
-          <a:p>
-            <a:r>
-              <a:rPr lang="zh-CN" dirty="0"/>
-              <a:t>· 同一函数用三种方式调用并比较</a:t>
-            </a:r>
-          </a:p>
-          <a:p>
-            <a:r>
-              <a:rPr lang="zh-CN" dirty="0"/>
-              <a:t>· ★ A/B 对照：函数改列表 vs 返回新列表</a:t>
-            </a:r>
-          </a:p>
-          <a:p>
-            <a:r>
-              <a:rPr lang="zh-CN" dirty="0"/>
-              <a:t>· ★ B/C/D 对照：传列表 / 传切片 / 传副本</a:t>
-            </a:r>
-          </a:p>
-          <a:p>
-            <a:r>
-              <a:rPr lang="zh-CN" dirty="0"/>
-              <a:t/>
-            </a:r>
-          </a:p>
-          <a:p>
-            <a:r>
-              <a:rPr lang="zh-CN" dirty="0"/>
-              <a:t>课后作业：</a:t>
-            </a:r>
-          </a:p>
-          <a:p>
-            <a:r>
-              <a:rPr lang="zh-CN" dirty="0"/>
-              <a:t>· 完成题库 L3-3（改与不改）</a:t>
-            </a:r>
-          </a:p>
-          <a:p>
-            <a:r>
-              <a:rPr lang="zh-CN" dirty="0"/>
-              <a:t/>
-            </a:r>
-          </a:p>
-          <a:p>
-            <a:r>
-              <a:rPr lang="zh-CN" dirty="0"/>
-              <a:t>节奏：讲 20 分钟 → 学员自己敲 40 分钟（不看答案）→ 对讲评自查 20 分钟 → 写作业 10 分钟。</a:t>
-            </a:r>
-          </a:p>
-        </p:txBody>
-      </p:sp>
-    </p:spTree>
-  </p:cSld>
-  <p:clrMapOvr>
-    <a:masterClrMapping/>
-  </p:clrMapOvr>
-</p:notes>
-</file>
-
-<file path=ppt/notesSlides/notesSlide5.xml><?xml version="1.0" encoding="utf-8"?>
-<p:notes xmlns:a="http://schemas.openxmlformats.org/drawingml/2006/main" xmlns:p="http://schemas.openxmlformats.org/presentationml/2006/main" xmlns:r="http://schemas.openxmlformats.org/officeDocument/2006/relationships">
-  <p:cSld>
-    <p:spTree>
-      <p:nvGrpSpPr>
-        <p:cNvPr id="1" name=""/>
-        <p:cNvGrpSpPr/>
-        <p:nvPr/>
-      </p:nvGrpSpPr>
-      <p:grpSpPr>
-        <a:xfrm>
-          <a:off x="0" y="0"/>
-          <a:ext cx="0" cy="0"/>
-          <a:chOff x="0" y="0"/>
-          <a:chExt cx="0" cy="0"/>
-        </a:xfrm>
-      </p:grpSpPr>
-      <p:sp>
-        <p:nvSpPr>
-          <p:cNvPr id="2" name="讲课提示"/>
-          <p:cNvSpPr txBox="1"/>
-          <p:nvPr/>
-        </p:nvSpPr>
-        <p:spPr>
-          <a:xfrm>
-            <a:off x="457200" y="457200"/>
-            <a:ext cx="6858000" cy="4800600"/>
-          </a:xfrm>
-          <a:prstGeom prst="rect">
-            <a:avLst/>
-          </a:prstGeom>
-        </p:spPr>
-        <p:txBody>
-          <a:bodyPr wrap="square"/>
-          <a:lstStyle/>
-          <a:p>
-            <a:r>
-              <a:rPr lang="zh-CN" dirty="0"/>
-              <a:t>第 34 节 · 核心知识点：三种参数写法与★ 参数传递的副本语义</a:t>
-            </a:r>
-          </a:p>
-          <a:p>
-            <a:r>
-              <a:rPr lang="zh-CN" dirty="0"/>
-              <a:t/>
-            </a:r>
-          </a:p>
-          <a:p>
-            <a:r>
-              <a:rPr lang="zh-CN" dirty="0"/>
-              <a:t>讲这一页时：先让学生说出上节课的结论，再逐块讲要点。</a:t>
-            </a:r>
-          </a:p>
-          <a:p>
-            <a:r>
-              <a:rPr lang="zh-CN" dirty="0"/>
-              <a:t>每讲完一块，问一句「这一步如果写错了，报错会长什么样？」——把错误提前讲。</a:t>
-            </a:r>
-          </a:p>
-          <a:p>
-            <a:r>
-              <a:rPr lang="zh-CN" dirty="0"/>
-              <a:t/>
-            </a:r>
-          </a:p>
-          <a:p>
-            <a:r>
-              <a:rPr lang="zh-CN" dirty="0"/>
-              <a:t>本节目标：掌握位置 / 关键字 / 默认值三种写法；理解传列表会改到原列表</a:t>
-            </a:r>
-          </a:p>
-          <a:p>
-            <a:r>
-              <a:rPr lang="zh-CN" dirty="0"/>
-              <a:t/>
-            </a:r>
-          </a:p>
-          <a:p>
-            <a:r>
-              <a:rPr lang="zh-CN" dirty="0"/>
-              <a:t>看不到懂的地方，回讲义对应小节读一遍，再回来对着这页复述一次——能讲出来才算真懂。</a:t>
-            </a:r>
-          </a:p>
-        </p:txBody>
-      </p:sp>
-    </p:spTree>
-  </p:cSld>
-  <p:clrMapOvr>
-    <a:masterClrMapping/>
-  </p:clrMapOvr>
-</p:notes>
-</file>
-
-<file path=ppt/notesSlides/notesSlide6.xml><?xml version="1.0" encoding="utf-8"?>
-<p:notes xmlns:a="http://schemas.openxmlformats.org/drawingml/2006/main" xmlns:p="http://schemas.openxmlformats.org/presentationml/2006/main" xmlns:r="http://schemas.openxmlformats.org/officeDocument/2006/relationships">
-  <p:cSld>
-    <p:spTree>
-      <p:nvGrpSpPr>
-        <p:cNvPr id="1" name=""/>
-        <p:cNvGrpSpPr/>
-        <p:nvPr/>
-      </p:nvGrpSpPr>
-      <p:grpSpPr>
-        <a:xfrm>
-          <a:off x="0" y="0"/>
-          <a:ext cx="0" cy="0"/>
-          <a:chOff x="0" y="0"/>
-          <a:chExt cx="0" cy="0"/>
-        </a:xfrm>
-      </p:grpSpPr>
-      <p:sp>
-        <p:nvSpPr>
-          <p:cNvPr id="2" name="讲课提示"/>
-          <p:cNvSpPr txBox="1"/>
-          <p:nvPr/>
-        </p:nvSpPr>
-        <p:spPr>
-          <a:xfrm>
-            <a:off x="457200" y="457200"/>
-            <a:ext cx="6858000" cy="4800600"/>
-          </a:xfrm>
-          <a:prstGeom prst="rect">
-            <a:avLst/>
-          </a:prstGeom>
-        </p:spPr>
-        <p:txBody>
-          <a:bodyPr wrap="square"/>
-          <a:lstStyle/>
-          <a:p>
-            <a:r>
-              <a:rPr lang="zh-CN" dirty="0"/>
-              <a:t>第 35 节 · 作用域与函数是一等公民</a:t>
-            </a:r>
-          </a:p>
-          <a:p>
-            <a:r>
-              <a:rPr lang="zh-CN" dirty="0"/>
-              <a:t>单元 7 · 函数 · W7–W8</a:t>
-            </a:r>
-          </a:p>
-          <a:p>
-            <a:r>
-              <a:rPr lang="zh-CN" dirty="0"/>
-              <a:t/>
-            </a:r>
-          </a:p>
-          <a:p>
-            <a:r>
-              <a:rPr lang="zh-CN" dirty="0"/>
-              <a:t>学习目标：理解局部与全局，知道函数能赋值给变量、能传进别的函数</a:t>
-            </a:r>
-          </a:p>
-          <a:p>
-            <a:r>
-              <a:rPr lang="zh-CN" dirty="0"/>
-              <a:t/>
-            </a:r>
-          </a:p>
-          <a:p>
-            <a:r>
-              <a:rPr lang="zh-CN" dirty="0"/>
-              <a:t>课堂实操（40 分钟，不看答案）：</a:t>
-            </a:r>
-          </a:p>
-          <a:p>
-            <a:r>
-              <a:rPr lang="zh-CN" dirty="0"/>
-              <a:t>· 现场触发一次 NameError</a:t>
-            </a:r>
-          </a:p>
-          <a:p>
-            <a:r>
-              <a:rPr lang="zh-CN" dirty="0"/>
-              <a:t>· 把函数赋给变量再调用</a:t>
-            </a:r>
-          </a:p>
-          <a:p>
-            <a:r>
-              <a:rPr lang="zh-CN" dirty="0"/>
-              <a:t/>
-            </a:r>
-          </a:p>
-          <a:p>
-            <a:r>
-              <a:rPr lang="zh-CN" dirty="0"/>
-              <a:t>课后作业：</a:t>
-            </a:r>
-          </a:p>
-          <a:p>
-            <a:r>
-              <a:rPr lang="zh-CN" dirty="0"/>
-              <a:t>· 完成动手练习 7-3 ~ 7-4</a:t>
-            </a:r>
-          </a:p>
-          <a:p>
-            <a:r>
-              <a:rPr lang="zh-CN" dirty="0"/>
-              <a:t/>
-            </a:r>
-          </a:p>
-          <a:p>
-            <a:r>
-              <a:rPr lang="zh-CN" dirty="0"/>
-              <a:t>节奏：讲 20 分钟 → 学员自己敲 40 分钟（不看答案）→ 对讲评自查 20 分钟 → 写作业 10 分钟。</a:t>
-            </a:r>
-          </a:p>
-        </p:txBody>
-      </p:sp>
-    </p:spTree>
-  </p:cSld>
-  <p:clrMapOvr>
-    <a:masterClrMapping/>
-  </p:clrMapOvr>
-</p:notes>
-</file>
-
-<file path=ppt/notesSlides/notesSlide7.xml><?xml version="1.0" encoding="utf-8"?>
-<p:notes xmlns:a="http://schemas.openxmlformats.org/drawingml/2006/main" xmlns:p="http://schemas.openxmlformats.org/presentationml/2006/main" xmlns:r="http://schemas.openxmlformats.org/officeDocument/2006/relationships">
-  <p:cSld>
-    <p:spTree>
-      <p:nvGrpSpPr>
-        <p:cNvPr id="1" name=""/>
-        <p:cNvGrpSpPr/>
-        <p:nvPr/>
-      </p:nvGrpSpPr>
-      <p:grpSpPr>
-        <a:xfrm>
-          <a:off x="0" y="0"/>
-          <a:ext cx="0" cy="0"/>
-          <a:chOff x="0" y="0"/>
-          <a:chExt cx="0" cy="0"/>
-        </a:xfrm>
-      </p:grpSpPr>
-      <p:sp>
-        <p:nvSpPr>
-          <p:cNvPr id="2" name="讲课提示"/>
-          <p:cNvSpPr txBox="1"/>
-          <p:nvPr/>
-        </p:nvSpPr>
-        <p:spPr>
-          <a:xfrm>
-            <a:off x="457200" y="457200"/>
-            <a:ext cx="6858000" cy="4800600"/>
-          </a:xfrm>
-          <a:prstGeom prst="rect">
-            <a:avLst/>
-          </a:prstGeom>
-        </p:spPr>
-        <p:txBody>
-          <a:bodyPr wrap="square"/>
-          <a:lstStyle/>
-          <a:p>
-            <a:r>
-              <a:rPr lang="zh-CN" dirty="0"/>
-              <a:t>第 35 节 · 核心知识点：作用域与函数是一等公民</a:t>
-            </a:r>
-          </a:p>
-          <a:p>
-            <a:r>
-              <a:rPr lang="zh-CN" dirty="0"/>
-              <a:t/>
-            </a:r>
-          </a:p>
-          <a:p>
-            <a:r>
-              <a:rPr lang="zh-CN" dirty="0"/>
-              <a:t>讲这一页时：先让学生说出上节课的结论，再逐块讲要点。</a:t>
-            </a:r>
-          </a:p>
-          <a:p>
-            <a:r>
-              <a:rPr lang="zh-CN" dirty="0"/>
-              <a:t>每讲完一块，问一句「这一步如果写错了，报错会长什么样？」——把错误提前讲。</a:t>
-            </a:r>
-          </a:p>
-          <a:p>
-            <a:r>
-              <a:rPr lang="zh-CN" dirty="0"/>
-              <a:t/>
-            </a:r>
-          </a:p>
-          <a:p>
-            <a:r>
-              <a:rPr lang="zh-CN" dirty="0"/>
-              <a:t>本节目标：理解局部与全局，知道函数能赋值给变量、能传进别的函数</a:t>
-            </a:r>
-          </a:p>
-          <a:p>
-            <a:r>
-              <a:rPr lang="zh-CN" dirty="0"/>
-              <a:t/>
-            </a:r>
-          </a:p>
-          <a:p>
-            <a:r>
-              <a:rPr lang="zh-CN" dirty="0"/>
-              <a:t>看不到懂的地方，回讲义对应小节读一遍，再回来对着这页复述一次——能讲出来才算真懂。</a:t>
-            </a:r>
-          </a:p>
-        </p:txBody>
-      </p:sp>
-    </p:spTree>
-  </p:cSld>
-  <p:clrMapOvr>
-    <a:masterClrMapping/>
-  </p:clrMapOvr>
-</p:notes>
-</file>
-
-<file path=ppt/notesSlides/notesSlide8.xml><?xml version="1.0" encoding="utf-8"?>
-<p:notes xmlns:a="http://schemas.openxmlformats.org/drawingml/2006/main" xmlns:p="http://schemas.openxmlformats.org/presentationml/2006/main" xmlns:r="http://schemas.openxmlformats.org/officeDocument/2006/relationships">
-  <p:cSld>
-    <p:spTree>
-      <p:nvGrpSpPr>
-        <p:cNvPr id="1" name=""/>
-        <p:cNvGrpSpPr/>
-        <p:nvPr/>
-      </p:nvGrpSpPr>
-      <p:grpSpPr>
-        <a:xfrm>
-          <a:off x="0" y="0"/>
-          <a:ext cx="0" cy="0"/>
-          <a:chOff x="0" y="0"/>
-          <a:chExt cx="0" cy="0"/>
-        </a:xfrm>
-      </p:grpSpPr>
-      <p:sp>
-        <p:nvSpPr>
-          <p:cNvPr id="2" name="讲课提示"/>
-          <p:cNvSpPr txBox="1"/>
-          <p:nvPr/>
-        </p:nvSpPr>
-        <p:spPr>
-          <a:xfrm>
-            <a:off x="457200" y="457200"/>
-            <a:ext cx="6858000" cy="4800600"/>
-          </a:xfrm>
-          <a:prstGeom prst="rect">
-            <a:avLst/>
-          </a:prstGeom>
-        </p:spPr>
-        <p:txBody>
-          <a:bodyPr wrap="square"/>
-          <a:lstStyle/>
-          <a:p>
-            <a:r>
-              <a:rPr lang="zh-CN" dirty="0"/>
-              <a:t>第 36 节 · 七个示例串讲与拆模块</a:t>
-            </a:r>
-          </a:p>
-          <a:p>
-            <a:r>
-              <a:rPr lang="zh-CN" dirty="0"/>
-              <a:t>单元 7 · 函数 · W7–W8</a:t>
-            </a:r>
-          </a:p>
-          <a:p>
-            <a:r>
-              <a:rPr lang="zh-CN" dirty="0"/>
-              <a:t/>
-            </a:r>
-          </a:p>
-          <a:p>
-            <a:r>
-              <a:rPr lang="zh-CN" dirty="0"/>
-              <a:t>学习目标：把课堂示例改成自己的模块，理解导入的四种写法</a:t>
-            </a:r>
-          </a:p>
-          <a:p>
-            <a:r>
-              <a:rPr lang="zh-CN" dirty="0"/>
-              <a:t/>
-            </a:r>
-          </a:p>
-          <a:p>
-            <a:r>
-              <a:rPr lang="zh-CN" dirty="0"/>
-              <a:t>课堂实操（40 分钟，不看答案）：</a:t>
-            </a:r>
-          </a:p>
-          <a:p>
-            <a:r>
-              <a:rPr lang="zh-CN" dirty="0"/>
-              <a:t>· 把三个函数拆到两个模块里并 import</a:t>
-            </a:r>
-          </a:p>
-          <a:p>
-            <a:r>
-              <a:rPr lang="zh-CN" dirty="0"/>
-              <a:t>· 对照示例讲清每段的意图</a:t>
-            </a:r>
-          </a:p>
-          <a:p>
-            <a:r>
-              <a:rPr lang="zh-CN" dirty="0"/>
-              <a:t/>
-            </a:r>
-          </a:p>
-          <a:p>
-            <a:r>
-              <a:rPr lang="zh-CN" dirty="0"/>
-              <a:t>课后作业：</a:t>
-            </a:r>
-          </a:p>
-          <a:p>
-            <a:r>
-              <a:rPr lang="zh-CN" dirty="0"/>
-              <a:t>· 完成动手练习进阶档 7-5 ~ 7-8</a:t>
-            </a:r>
-          </a:p>
-          <a:p>
-            <a:r>
-              <a:rPr lang="zh-CN" dirty="0"/>
-              <a:t/>
-            </a:r>
-          </a:p>
-          <a:p>
-            <a:r>
-              <a:rPr lang="zh-CN" dirty="0"/>
-              <a:t>节奏：讲 20 分钟 → 学员自己敲 40 分钟（不看答案）→ 对讲评自查 20 分钟 → 写作业 10 分钟。</a:t>
-            </a:r>
-          </a:p>
-        </p:txBody>
-      </p:sp>
-    </p:spTree>
-  </p:cSld>
-  <p:clrMapOvr>
-    <a:masterClrMapping/>
-  </p:clrMapOvr>
-</p:notes>
-</file>
-
-<file path=ppt/notesSlides/notesSlide9.xml><?xml version="1.0" encoding="utf-8"?>
-<p:notes xmlns:a="http://schemas.openxmlformats.org/drawingml/2006/main" xmlns:p="http://schemas.openxmlformats.org/presentationml/2006/main" xmlns:r="http://schemas.openxmlformats.org/officeDocument/2006/relationships">
-  <p:cSld>
-    <p:spTree>
-      <p:nvGrpSpPr>
-        <p:cNvPr id="1" name=""/>
-        <p:cNvGrpSpPr/>
-        <p:nvPr/>
-      </p:nvGrpSpPr>
-      <p:grpSpPr>
-        <a:xfrm>
-          <a:off x="0" y="0"/>
-          <a:ext cx="0" cy="0"/>
-          <a:chOff x="0" y="0"/>
-          <a:chExt cx="0" cy="0"/>
-        </a:xfrm>
-      </p:grpSpPr>
-      <p:sp>
-        <p:nvSpPr>
-          <p:cNvPr id="2" name="讲课提示"/>
-          <p:cNvSpPr txBox="1"/>
-          <p:nvPr/>
-        </p:nvSpPr>
-        <p:spPr>
-          <a:xfrm>
-            <a:off x="457200" y="457200"/>
-            <a:ext cx="6858000" cy="4800600"/>
-          </a:xfrm>
-          <a:prstGeom prst="rect">
-            <a:avLst/>
-          </a:prstGeom>
-        </p:spPr>
-        <p:txBody>
-          <a:bodyPr wrap="square"/>
-          <a:lstStyle/>
-          <a:p>
-            <a:r>
-              <a:rPr lang="zh-CN" dirty="0"/>
-              <a:t>第 36 节 · 核心知识点：七个示例串讲与拆模块</a:t>
-            </a:r>
-          </a:p>
-          <a:p>
-            <a:r>
-              <a:rPr lang="zh-CN" dirty="0"/>
-              <a:t/>
-            </a:r>
-          </a:p>
-          <a:p>
-            <a:r>
-              <a:rPr lang="zh-CN" dirty="0"/>
-              <a:t>讲这一页时：先让学生说出上节课的结论，再逐块讲要点。</a:t>
-            </a:r>
-          </a:p>
-          <a:p>
-            <a:r>
-              <a:rPr lang="zh-CN" dirty="0"/>
-              <a:t>每讲完一块，问一句「这一步如果写错了，报错会长什么样？」——把错误提前讲。</a:t>
-            </a:r>
-          </a:p>
-          <a:p>
-            <a:r>
-              <a:rPr lang="zh-CN" dirty="0"/>
-              <a:t/>
-            </a:r>
-          </a:p>
-          <a:p>
-            <a:r>
-              <a:rPr lang="zh-CN" dirty="0"/>
-              <a:t>本节目标：把课堂示例改成自己的模块，理解导入的四种写法</a:t>
-            </a:r>
-          </a:p>
-          <a:p>
-            <a:r>
-              <a:rPr lang="zh-CN" dirty="0"/>
-              <a:t/>
-            </a:r>
-          </a:p>
-          <a:p>
-            <a:r>
-              <a:rPr lang="zh-CN" dirty="0"/>
-              <a:t>看不到懂的地方，回讲义对应小节读一遍，再回来对着这页复述一次——能讲出来才算真懂。</a:t>
-            </a:r>
-          </a:p>
-        </p:txBody>
-      </p:sp>
-    </p:spTree>
-  </p:cSld>
-  <p:clrMapOvr>
-    <a:masterClrMapping/>
-  </p:clrMapOvr>
-</p:notes>
 </file>
 
 <file path=ppt/slideLayouts/slideLayout1.xml><?xml version="1.0" encoding="utf-8"?>

--- a/python-course-ppt/逐节课件/Python讲授课件-单元07.pptx
+++ b/python-course-ppt/逐节课件/Python讲授课件-单元07.pptx
@@ -1514,7 +1514,7 @@
   <p:cSld>
     <p:spTree>
       <p:nvGrpSpPr>
-        <p:cNvPr id="28" name="" descr="&lt;Slide style={{ width: '1280px', height: '720px', backgroundColor: '#FAFCFE', padding: 0, position: 'relative', overflow: 'hidden' }}&gt;&#13;&#10;    &lt;Box style={{ position: 'absolute', left: 64, top: 36, width: '1152px', flexDirection: 'row', alignItems: 'center', gap: 12 }}&gt;&#13;&#10;        &lt;Box style={{ background: '#0E9B78', borderRadius: 5, padding: '3px 11px' }}&gt;&#13;&#10;            &lt;Text style={{ fontSize: 14, fontWeight: 'bold', color: '#FFFFFF' }}&gt;第 38 节&lt;/Text&gt;&#13;&#10;        &lt;/Box&gt;&#13;&#10;        &lt;Text style={{ fontSize: 30, fontWeight: 'bold', color: '#16232E' }}&gt;核心知识点&lt;/Text&gt;&#13;&#10;        &lt;Text style={{ fontSize: 15, color: '#5A6B7A', marginTop: 10 }}&gt;· ★ 六个常见错误逐条自查&lt;/Text&gt;&#13;&#10;    &lt;/Box&gt;&#13;&#10;    &lt;Box style={{ position: 'absolute', left: 0, top: 0, width: '1280px', height: '720px' }}&gt;&#13;&#10;        &lt;svg width='1280' height='720' viewBox='0 0 1280 720'&gt;&#13;&#10;            &lt;rect x='64' y='96' width='368' height='330' rx='12' fill='#FFFFFF' stroke='#D8E3EE' /&gt;&lt;rect x='64' y='96' width='368' height='4' rx='2' fill='#1F5FA8' /&gt;&lt;text x='82' y='130' fontSize='15.5' fontWeight='bold' fill='#1F5FA8' textAnchor='start' fontFamily='Microsoft YaHei'&gt;错误 1：忘记写冒号，或缩进错误&lt;/text&gt;&lt;text x='82' y='169.0' fontSize='13' fill='#3A4A58' textAnchor='start' fontFamily='Microsoft YaHei'&gt;· def greet(name) # 错误 1a：括号后面漏了冒号&lt;/text&gt;&lt;rect x='468' y='96' width='368' height='330' rx='12' fill='#FFFFFF' stroke='#D8E3EE' /&gt;&lt;rect x='468' y='96' width='368' height='4' rx='2' fill='#1F5FA8' /&gt;&lt;text x='486' y='130' fontSize='15.5' fontWeight='bold' fill='#1F5FA8' textAnchor='start' fontFamily='Microsoft YaHei'&gt;错误 2：★ 函数修改列表，会改到原列表&lt;/text&gt;&lt;text x='486' y='169.0' fontSize='13' fill='#3A4A58' textAnchor='start' fontFamily='Microsoft YaHei'&gt;· def add_item(items):&lt;/text&gt;&lt;rect x='872' y='96' width='368' height='330' rx='12' fill='#FFFFFF' stroke='#D8E3EE' /&gt;&lt;rect x='872' y='96' width='368' height='4' rx='2' fill='#1F5FA8' /&gt;&lt;text x='890' y='130' fontSize='15.5' fontWeight='bold' fill='#1F5FA8' textAnchor='start' fontFamily='Microsoft YaHei'&gt;错误 3：默认参数用了可变对象&lt;/text&gt;&lt;text x='890' y='169.0' fontSize='13' fill='#3A4A58' textAnchor='start' fontFamily='Microsoft YaHei'&gt;· def add_task(task, todo=[]): # 错误：默认值是&lt;/text&gt;&lt;text x='890' y='188.5' fontSize='13' fill='#3A4A58' textAnchor='start' fontFamily='Microsoft YaHei'&gt;列表！&lt;/text&gt;&lt;rect x='64' y='574' width='1152' height='66' rx='12' fill='#EEF5FB' /&gt;&lt;text x='84' y='616' fontSize='14' fill='#243444' textAnchor='start' fontFamily='Microsoft YaHei'&gt;看不懂的地方先回讲义对应小节读一遍，再回来对着这页复述一次——能讲出来才算真懂。&lt;/text&gt;&#13;&#10;            &lt;text x='64' y='684' fontSize='13' fill='#8A9AAA' fontFamily='Microsoft YaHei'&gt;Python 讲授课件 · 逐节版&lt;/text&gt;&#13;&#10;            &lt;text x='1216' y='684' fontSize='13' fill='#8A9AAA' textAnchor='end' fontFamily='Microsoft YaHei'&gt;单元 7 · 第 38 节&lt;/text&gt;&#13;&#10;        &lt;/svg&gt;&#13;&#10;    &lt;/Box&gt;&#13;&#10;&lt;/Slide&gt;&#13;&#10;"/>
+        <p:cNvPr id="28" name="" descr="&lt;Slide style={{ width: '1280px', height: '720px', backgroundColor: '#FAFCFE', padding: 0, position: 'relative', overflow: 'hidden' }}&gt;&#13;&#10;    &lt;Box style={{ position: 'absolute', left: 64, top: 36, width: '1152px', flexDirection: 'row', alignItems: 'center', gap: 12 }}&gt;&#13;&#10;        &lt;Box style={{ background: '#0E9B78', borderRadius: 5, padding: '3px 11px' }}&gt;&#13;&#10;            &lt;Text style={{ fontSize: 14, fontWeight: 'bold', color: '#FFFFFF' }}&gt;第 38 节&lt;/Text&gt;&#13;&#10;        &lt;/Box&gt;&#13;&#10;        &lt;Text style={{ fontSize: 30, fontWeight: 'bold', color: '#16232E' }}&gt;核心知识点&lt;/Text&gt;&#13;&#10;        &lt;Text style={{ fontSize: 15, color: '#5A6B7A', marginTop: 10 }}&gt;· ★ 六个常见错误逐条自查&lt;/Text&gt;&#13;&#10;    &lt;/Box&gt;&#13;&#10;    &lt;Box style={{ position: 'absolute', left: 0, top: 0, width: '1280px', height: '720px' }}&gt;&#13;&#10;        &lt;svg width='1280' height='720' viewBox='0 0 1280 720'&gt;&#13;&#10;            &lt;rect x='64' y='96' width='368' height='330' rx='12' fill='#FFFFFF' stroke='#D8E3EE' /&gt;&lt;rect x='64' y='96' width='368' height='4' rx='2' fill='#1F5FA8' /&gt;&lt;text x='82' y='130' fontSize='15.5' fontWeight='bold' fill='#1F5FA8' textAnchor='start' fontFamily='Microsoft YaHei'&gt;错误 1：忘记写冒号，或缩进错误&lt;/text&gt;&lt;text x='82' y='169.0' fontSize='13' fill='#3A4A58' textAnchor='start' fontFamily='Microsoft YaHei'&gt;· def greet(name) # 错误 1a：括号后面漏了冒号&lt;/text&gt;&lt;rect x='468' y='96' width='368' height='330' rx='12' fill='#FFFFFF' stroke='#D8E3EE' /&gt;&lt;rect x='468' y='96' width='368' height='4' rx='2' fill='#1F5FA8' /&gt;&lt;text x='486' y='130' fontSize='15.5' fontWeight='bold' fill='#1F5FA8' textAnchor='start' fontFamily='Microsoft YaHei'&gt;错误 2：★ 函数修改列表，会改到原列表&lt;/text&gt;&lt;text x='486' y='169.0' fontSize='13' fill='#3A4A58' textAnchor='start' fontFamily='Microsoft YaHei'&gt;· def add_item(items):&lt;/text&gt;&lt;rect x='872' y='96' width='368' height='330' rx='12' fill='#FFFFFF' stroke='#D8E3EE' /&gt;&lt;rect x='872' y='96' width='368' height='4' rx='2' fill='#1F5FA8' /&gt;&lt;text x='890' y='130' fontSize='15.5' fontWeight='bold' fill='#1F5FA8' textAnchor='start' fontFamily='Microsoft YaHei'&gt;错误 3：默认参数用了可变对象&lt;/text&gt;&lt;text x='890' y='169.0' fontSize='13' fill='#3A4A58' textAnchor='start' fontFamily='Microsoft YaHei'&gt;· def add_task(task, todo=[]): # 错误：&lt;/text&gt;&lt;text x='890' y='188.5' fontSize='13' fill='#3A4A58' textAnchor='start' fontFamily='Microsoft YaHei'&gt;默认值是列表！&lt;/text&gt;&lt;rect x='64' y='574' width='1152' height='66' rx='12' fill='#EEF5FB' /&gt;&lt;text x='84' y='616' fontSize='14' fill='#243444' textAnchor='start' fontFamily='Microsoft YaHei'&gt;看不懂的地方先回讲义对应小节读一遍，再回来对着这页复述一次——能讲出来才算真懂。&lt;/text&gt;&#13;&#10;            &lt;text x='64' y='684' fontSize='13' fill='#8A9AAA' fontFamily='Microsoft YaHei'&gt;Python 讲授课件 · 逐节版&lt;/text&gt;&#13;&#10;            &lt;text x='1216' y='684' fontSize='13' fill='#8A9AAA' textAnchor='end' fontFamily='Microsoft YaHei'&gt;单元 7 · 第 38 节&lt;/text&gt;&#13;&#10;        &lt;/svg&gt;&#13;&#10;    &lt;/Box&gt;&#13;&#10;&lt;/Slide&gt;&#13;&#10;"/>
         <p:cNvGrpSpPr/>
         <p:nvPr/>
       </p:nvGrpSpPr>
@@ -3016,7 +3016,7 @@
   <p:cSld>
     <p:spTree>
       <p:nvGrpSpPr>
-        <p:cNvPr id="68" name="" descr="&lt;Slide style={{ width: '1280px', height: '720px', backgroundColor: '#FAFCFE', padding: 0, position: 'relative', overflow: 'hidden' }}&gt;&#13;&#10;    &lt;Box style={{ position: 'absolute', left: 64, top: 36, width: '1152px', flexDirection: 'row', alignItems: 'center', gap: 12 }}&gt;&#13;&#10;        &lt;Box style={{ background: '#0E9B78', borderRadius: 5, padding: '3px 11px' }}&gt;&#13;&#10;            &lt;Text style={{ fontSize: 14, fontWeight: 'bold', color: '#FFFFFF' }}&gt;第 33 节&lt;/Text&gt;&#13;&#10;        &lt;/Box&gt;&#13;&#10;        &lt;Text style={{ fontSize: 30, fontWeight: 'bold', color: '#16232E' }}&gt;核心知识点&lt;/Text&gt;&#13;&#10;        &lt;Text style={{ fontSize: 15, color: '#5A6B7A', marginTop: 10 }}&gt;· 定义函数与 return&lt;/Text&gt;&#13;&#10;    &lt;/Box&gt;&#13;&#10;    &lt;Box style={{ position: 'absolute', left: 0, top: 0, width: '1280px', height: '720px' }}&gt;&#13;&#10;        &lt;svg width='1280' height='720' viewBox='0 0 1280 720'&gt;&#13;&#10;            &lt;rect x='64' y='96' width='548' height='330' rx='12' fill='#FFFFFF' stroke='#D8E3EE' /&gt;&lt;rect x='64' y='96' width='548' height='4' rx='2' fill='#1F5FA8' /&gt;&lt;text x='82' y='130' fontSize='15.5' fontWeight='bold' fill='#1F5FA8' textAnchor='start' fontFamily='Microsoft YaHei'&gt;2.1 函数：给一段代码起个名字&lt;/text&gt;&lt;text x='82' y='169.0' fontSize='13' fill='#3A4A58' textAnchor='start' fontFamily='Microsoft YaHei'&gt;· 没有函数时，计算 BMI 的代码要在不同地方重复写三遍：&lt;/text&gt;&lt;rect x='668' y='96' width='548' height='330' rx='12' fill='#FFFFFF' stroke='#D8E3EE' /&gt;&lt;rect x='668' y='96' width='548' height='4' rx='2' fill='#1F5FA8' /&gt;&lt;text x='686' y='130' fontSize='15.5' fontWeight='bold' fill='#1F5FA8' textAnchor='start' fontFamily='Microsoft YaHei'&gt;2.2 return：把结果&quot;递出窗口&quot;&lt;/text&gt;&lt;text x='686' y='169.0' fontSize='13' fill='#3A4A58' textAnchor='start' fontFamily='Microsoft YaHei'&gt;· 有 return 和没 return 的本质区别：&lt;/text&gt;&lt;text x='686' y='197.5' fontSize='13' fill='#3A4A58' textAnchor='start' fontFamily='Microsoft YaHei'&gt;· 两条极重要的规则：&lt;/text&gt;&lt;rect x='64' y='574' width='1152' height='66' rx='12' fill='#EEF5FB' /&gt;&lt;text x='84' y='616' fontSize='14' fill='#243444' textAnchor='start' fontFamily='Microsoft YaHei'&gt;看不懂的地方先回讲义对应小节读一遍，再回来对着这页复述一次——能讲出来才算真懂。&lt;/text&gt;&#13;&#10;            &lt;text x='64' y='684' fontSize='13' fill='#8A9AAA' fontFamily='Microsoft YaHei'&gt;Python 讲授课件 · 逐节版&lt;/text&gt;&#13;&#10;            &lt;text x='1216' y='684' fontSize='13' fill='#8A9AAA' textAnchor='end' fontFamily='Microsoft YaHei'&gt;单元 7 · 第 33 节&lt;/text&gt;&#13;&#10;        &lt;/svg&gt;&#13;&#10;    &lt;/Box&gt;&#13;&#10;&lt;/Slide&gt;&#13;&#10;"/>
+        <p:cNvPr id="68" name="" descr="&lt;Slide style={{ width: '1280px', height: '720px', backgroundColor: '#FAFCFE', padding: 0, position: 'relative', overflow: 'hidden' }}&gt;&#13;&#10;    &lt;Box style={{ position: 'absolute', left: 64, top: 36, width: '1152px', flexDirection: 'row', alignItems: 'center', gap: 12 }}&gt;&#13;&#10;        &lt;Box style={{ background: '#0E9B78', borderRadius: 5, padding: '3px 11px' }}&gt;&#13;&#10;            &lt;Text style={{ fontSize: 14, fontWeight: 'bold', color: '#FFFFFF' }}&gt;第 33 节&lt;/Text&gt;&#13;&#10;        &lt;/Box&gt;&#13;&#10;        &lt;Text style={{ fontSize: 30, fontWeight: 'bold', color: '#16232E' }}&gt;核心知识点&lt;/Text&gt;&#13;&#10;        &lt;Text style={{ fontSize: 15, color: '#5A6B7A', marginTop: 10 }}&gt;· 定义函数与 return&lt;/Text&gt;&#13;&#10;    &lt;/Box&gt;&#13;&#10;    &lt;Box style={{ position: 'absolute', left: 0, top: 0, width: '1280px', height: '720px' }}&gt;&#13;&#10;        &lt;svg width='1280' height='720' viewBox='0 0 1280 720'&gt;&#13;&#10;            &lt;rect x='64' y='96' width='548' height='330' rx='12' fill='#FFFFFF' stroke='#D8E3EE' /&gt;&lt;rect x='64' y='96' width='548' height='4' rx='2' fill='#1F5FA8' /&gt;&lt;text x='82' y='130' fontSize='15.5' fontWeight='bold' fill='#1F5FA8' textAnchor='start' fontFamily='Microsoft YaHei'&gt;2.1 函数：给一段代码起个名字&lt;/text&gt;&lt;text x='82' y='169.0' fontSize='13' fill='#3A4A58' textAnchor='start' fontFamily='Microsoft YaHei'&gt;· 没有函数时，计算 BMI 的代码要在不同地方重复写三遍：&lt;/text&gt;&lt;rect x='668' y='96' width='548' height='330' rx='12' fill='#FFFFFF' stroke='#D8E3EE' /&gt;&lt;rect x='668' y='96' width='548' height='4' rx='2' fill='#1F5FA8' /&gt;&lt;text x='686' y='130' fontSize='15.5' fontWeight='bold' fill='#1F5FA8' textAnchor='start' fontFamily='Microsoft YaHei'&gt;2.2 return：把结果&quot;递出窗口&quot;&lt;/text&gt;&lt;text x='686' y='169.0' fontSize='13' fill='#3A4A58' textAnchor='start' fontFamily='Microsoft YaHei'&gt;· 有 return 和没 return 的本质区别&lt;/text&gt;&lt;text x='686' y='197.5' fontSize='13' fill='#3A4A58' textAnchor='start' fontFamily='Microsoft YaHei'&gt;· 两条极重要的规则&lt;/text&gt;&lt;rect x='64' y='574' width='1152' height='66' rx='12' fill='#EEF5FB' /&gt;&lt;text x='84' y='616' fontSize='14' fill='#243444' textAnchor='start' fontFamily='Microsoft YaHei'&gt;看不懂的地方先回讲义对应小节读一遍，再回来对着这页复述一次——能讲出来才算真懂。&lt;/text&gt;&#13;&#10;            &lt;text x='64' y='684' fontSize='13' fill='#8A9AAA' fontFamily='Microsoft YaHei'&gt;Python 讲授课件 · 逐节版&lt;/text&gt;&#13;&#10;            &lt;text x='1216' y='684' fontSize='13' fill='#8A9AAA' textAnchor='end' fontFamily='Microsoft YaHei'&gt;单元 7 · 第 33 节&lt;/text&gt;&#13;&#10;        &lt;/svg&gt;&#13;&#10;    &lt;/Box&gt;&#13;&#10;&lt;/Slide&gt;&#13;&#10;"/>
         <p:cNvGrpSpPr/>
         <p:nvPr/>
       </p:nvGrpSpPr>
@@ -3477,7 +3477,7 @@
   <p:cSld>
     <p:spTree>
       <p:nvGrpSpPr>
-        <p:cNvPr id="81" name="" descr="&lt;Slide style={{ width: '1280px', height: '720px', backgroundColor: '#FAFCFE', padding: 0, position: 'relative', overflow: 'hidden' }}&gt;&#13;&#10;    &lt;Box style={{ position: 'absolute', left: 64, top: 36, width: '1152px', flexDirection: 'row', alignItems: 'center', gap: 12 }}&gt;&#13;&#10;        &lt;Box style={{ background: '#0E9B78', borderRadius: 5, padding: '3px 11px' }}&gt;&#13;&#10;            &lt;Text style={{ fontSize: 14, fontWeight: 'bold', color: '#FFFFFF' }}&gt;第 34 节&lt;/Text&gt;&#13;&#10;        &lt;/Box&gt;&#13;&#10;        &lt;Text style={{ fontSize: 30, fontWeight: 'bold', color: '#16232E' }}&gt;核心知识点&lt;/Text&gt;&#13;&#10;        &lt;Text style={{ fontSize: 15, color: '#5A6B7A', marginTop: 10 }}&gt;· 三种参数写法与★ 参数传递的副本语义&lt;/Text&gt;&#13;&#10;    &lt;/Box&gt;&#13;&#10;    &lt;Box style={{ position: 'absolute', left: 0, top: 0, width: '1280px', height: '720px' }}&gt;&#13;&#10;        &lt;svg width='1280' height='720' viewBox='0 0 1280 720'&gt;&#13;&#10;            &lt;rect x='64' y='96' width='548' height='330' rx='12' fill='#FFFFFF' stroke='#D8E3EE' /&gt;&lt;rect x='64' y='96' width='548' height='4' rx='2' fill='#1F5FA8' /&gt;&lt;text x='82' y='130' fontSize='15.5' fontWeight='bold' fill='#1F5FA8' textAnchor='start' fontFamily='Microsoft YaHei'&gt;2.3 三种参数写法&lt;/text&gt;&lt;text x='82' y='169.0' fontSize='13' fill='#3A4A58' textAnchor='start' fontFamily='Microsoft YaHei'&gt;· Python 的强制规则：有默认值的参数必须放在没有默认值的参数后面。&lt;/text&gt;&lt;rect x='668' y='96' width='548' height='330' rx='12' fill='#FFFFFF' stroke='#D8E3EE' /&gt;&lt;rect x='668' y='96' width='548' height='4' rx='2' fill='#1F5FA8' /&gt;&lt;text x='686' y='130' fontSize='15.5' fontWeight='bold' fill='#1F5FA8' textAnchor='start' fontFamily='Microsoft YaHei'&gt;2.4 ★ 参数传递的副本语义（本单元最重要的概念）&lt;/text&gt;&lt;text x='686' y='169.0' fontSize='13' fill='#3A4A58' textAnchor='start' fontFamily='Microsoft YaHei'&gt;· Python 传递参数时，传递的永远是&quot;指向数据的地址&quot;。 而函数内部对参数做的操作，&lt;/text&gt;&lt;text x='686' y='188.5' fontSize='13' fill='#3A4A58' textAnchor='start' fontFamily='Microsoft YaHei'&gt;分为两类：&lt;/text&gt;&lt;text x='686' y='217.0' fontSize='13' fill='#3A4A58' textAnchor='start' fontFamily='Microsoft YaHei'&gt;· 生活化类比（务必记住这个）：&lt;/text&gt;&lt;text x='686' y='245.5' fontSize='13' fill='#3A4A58' textAnchor='start' fontFamily='Microsoft YaHei'&gt;· 三种正确的应对方式（按推荐程度排序）：&lt;/text&gt;&lt;rect x='64' y='574' width='1152' height='66' rx='12' fill='#EEF5FB' /&gt;&lt;text x='84' y='616' fontSize='14' fill='#243444' textAnchor='start' fontFamily='Microsoft YaHei'&gt;看不懂的地方先回讲义对应小节读一遍，再回来对着这页复述一次——能讲出来才算真懂。&lt;/text&gt;&#13;&#10;            &lt;text x='64' y='684' fontSize='13' fill='#8A9AAA' fontFamily='Microsoft YaHei'&gt;Python 讲授课件 · 逐节版&lt;/text&gt;&#13;&#10;            &lt;text x='1216' y='684' fontSize='13' fill='#8A9AAA' textAnchor='end' fontFamily='Microsoft YaHei'&gt;单元 7 · 第 34 节&lt;/text&gt;&#13;&#10;        &lt;/svg&gt;&#13;&#10;    &lt;/Box&gt;&#13;&#10;&lt;/Slide&gt;&#13;&#10;"/>
+        <p:cNvPr id="81" name="" descr="&lt;Slide style={{ width: '1280px', height: '720px', backgroundColor: '#FAFCFE', padding: 0, position: 'relative', overflow: 'hidden' }}&gt;&#13;&#10;    &lt;Box style={{ position: 'absolute', left: 64, top: 36, width: '1152px', flexDirection: 'row', alignItems: 'center', gap: 12 }}&gt;&#13;&#10;        &lt;Box style={{ background: '#0E9B78', borderRadius: 5, padding: '3px 11px' }}&gt;&#13;&#10;            &lt;Text style={{ fontSize: 14, fontWeight: 'bold', color: '#FFFFFF' }}&gt;第 34 节&lt;/Text&gt;&#13;&#10;        &lt;/Box&gt;&#13;&#10;        &lt;Text style={{ fontSize: 30, fontWeight: 'bold', color: '#16232E' }}&gt;核心知识点&lt;/Text&gt;&#13;&#10;        &lt;Text style={{ fontSize: 15, color: '#5A6B7A', marginTop: 10 }}&gt;· 三种参数写法与★ 参数传递的副本语义&lt;/Text&gt;&#13;&#10;    &lt;/Box&gt;&#13;&#10;    &lt;Box style={{ position: 'absolute', left: 0, top: 0, width: '1280px', height: '720px' }}&gt;&#13;&#10;        &lt;svg width='1280' height='720' viewBox='0 0 1280 720'&gt;&#13;&#10;            &lt;rect x='64' y='96' width='548' height='330' rx='12' fill='#FFFFFF' stroke='#D8E3EE' /&gt;&lt;rect x='64' y='96' width='548' height='4' rx='2' fill='#1F5FA8' /&gt;&lt;text x='82' y='130' fontSize='15.5' fontWeight='bold' fill='#1F5FA8' textAnchor='start' fontFamily='Microsoft YaHei'&gt;2.3 三种参数写法&lt;/text&gt;&lt;text x='82' y='169.0' fontSize='13' fill='#3A4A58' textAnchor='start' fontFamily='Microsoft YaHei'&gt;· Python 的强制规则：有默认值的参数必须放在没有默认值的参数后面。&lt;/text&gt;&lt;rect x='668' y='96' width='548' height='330' rx='12' fill='#FFFFFF' stroke='#D8E3EE' /&gt;&lt;rect x='668' y='96' width='548' height='4' rx='2' fill='#1F5FA8' /&gt;&lt;text x='686' y='130' fontSize='15.5' fontWeight='bold' fill='#1F5FA8' textAnchor='start' fontFamily='Microsoft YaHei'&gt;2.4 ★ 参数传递的副本语义（本单元最重要的概念）&lt;/text&gt;&lt;text x='686' y='169.0' fontSize='13' fill='#3A4A58' textAnchor='start' fontFamily='Microsoft YaHei'&gt;· Python 传递参数时，传递的永远是&quot;指向数据的地址&quot;。&lt;/text&gt;&lt;text x='686' y='197.5' fontSize='13' fill='#3A4A58' textAnchor='start' fontFamily='Microsoft YaHei'&gt;· 生活化类比（务必记住这个）：&lt;/text&gt;&lt;text x='686' y='226.0' fontSize='13' fill='#3A4A58' textAnchor='start' fontFamily='Microsoft YaHei'&gt;· 三种正确的应对方式&lt;/text&gt;&lt;rect x='64' y='574' width='1152' height='66' rx='12' fill='#EEF5FB' /&gt;&lt;text x='84' y='616' fontSize='14' fill='#243444' textAnchor='start' fontFamily='Microsoft YaHei'&gt;看不懂的地方先回讲义对应小节读一遍，再回来对着这页复述一次——能讲出来才算真懂。&lt;/text&gt;&#13;&#10;            &lt;text x='64' y='684' fontSize='13' fill='#8A9AAA' fontFamily='Microsoft YaHei'&gt;Python 讲授课件 · 逐节版&lt;/text&gt;&#13;&#10;            &lt;text x='1216' y='684' fontSize='13' fill='#8A9AAA' textAnchor='end' fontFamily='Microsoft YaHei'&gt;单元 7 · 第 34 节&lt;/text&gt;&#13;&#10;        &lt;/svg&gt;&#13;&#10;    &lt;/Box&gt;&#13;&#10;&lt;/Slide&gt;&#13;&#10;"/>
         <p:cNvGrpSpPr/>
         <p:nvPr/>
       </p:nvGrpSpPr>
@@ -3928,7 +3928,7 @@
   <p:cSld>
     <p:spTree>
       <p:nvGrpSpPr>
-        <p:cNvPr id="94" name="" descr="&lt;Slide style={{ width: '1280px', height: '720px', backgroundColor: '#FAFCFE', padding: 0, position: 'relative', overflow: 'hidden' }}&gt;&#13;&#10;    &lt;Box style={{ position: 'absolute', left: 64, top: 36, width: '1152px', flexDirection: 'row', alignItems: 'center', gap: 12 }}&gt;&#13;&#10;        &lt;Box style={{ background: '#0E9B78', borderRadius: 5, padding: '3px 11px' }}&gt;&#13;&#10;            &lt;Text style={{ fontSize: 14, fontWeight: 'bold', color: '#FFFFFF' }}&gt;第 35 节&lt;/Text&gt;&#13;&#10;        &lt;/Box&gt;&#13;&#10;        &lt;Text style={{ fontSize: 30, fontWeight: 'bold', color: '#16232E' }}&gt;核心知识点&lt;/Text&gt;&#13;&#10;        &lt;Text style={{ fontSize: 15, color: '#5A6B7A', marginTop: 10 }}&gt;· 作用域与函数是一等公民&lt;/Text&gt;&#13;&#10;    &lt;/Box&gt;&#13;&#10;    &lt;Box style={{ position: 'absolute', left: 0, top: 0, width: '1280px', height: '720px' }}&gt;&#13;&#10;        &lt;svg width='1280' height='720' viewBox='0 0 1280 720'&gt;&#13;&#10;            &lt;rect x='64' y='96' width='548' height='330' rx='12' fill='#FFFFFF' stroke='#D8E3EE' /&gt;&lt;rect x='64' y='96' width='548' height='4' rx='2' fill='#1F5FA8' /&gt;&lt;text x='82' y='130' fontSize='15.5' fontWeight='bold' fill='#1F5FA8' textAnchor='start' fontFamily='Microsoft YaHei'&gt;2.5 作用域：谁能看见谁&lt;/text&gt;&lt;text x='82' y='169.0' fontSize='13' fill='#3A4A58' textAnchor='start' fontFamily='Microsoft YaHei'&gt;· 函数内定义的变量是局部变量，只在函数内可见，函数结束就消失。&lt;/text&gt;&lt;text x='82' y='197.5' fontSize='13' fill='#3A4A58' textAnchor='start' fontFamily='Microsoft YaHei'&gt;· 函数可以读取全局变量，但不推荐修改全局变量。&lt;/text&gt;&lt;text x='82' y='226.0' fontSize='13' fill='#3A4A58' textAnchor='start' fontFamily='Microsoft YaHei'&gt;· 函数内如果要给一个名字赋值，Python 就认为它是局部的（不会去改全局的那个）。&lt;/text&gt;&lt;rect x='668' y='96' width='548' height='330' rx='12' fill='#FFFFFF' stroke='#D8E3EE' /&gt;&lt;rect x='668' y='96' width='548' height='4' rx='2' fill='#1F5FA8' /&gt;&lt;text x='686' y='130' fontSize='15.5' fontWeight='bold' fill='#1F5FA8' textAnchor='start' fontFamily='Microsoft YaHei'&gt;2.6 函数是&quot;一等公民&quot;&lt;/text&gt;&lt;text x='686' y='169.0' fontSize='13' fill='#3A4A58' textAnchor='start' fontFamily='Microsoft YaHei'&gt;· 赋给变量：double = lambda x: x 2（lambda 就是&quot;一次性小函数&quot;）&lt;/text&gt;&lt;text x='686' y='197.5' fontSize='13' fill='#3A4A58' textAnchor='start' fontFamily='Microsoft YaHei'&gt;· 当参数传给别的函数：sorted(scores, key=scores.get)&lt;/text&gt;&lt;text x='686' y='226.0' fontSize='13' fill='#3A4A58' textAnchor='start' fontFamily='Microsoft YaHei'&gt;· 放进列表：operations = [加, 减, 乘]&lt;/text&gt;&lt;rect x='64' y='574' width='1152' height='66' rx='12' fill='#EEF5FB' /&gt;&lt;text x='84' y='616' fontSize='14' fill='#243444' textAnchor='start' fontFamily='Microsoft YaHei'&gt;看不懂的地方先回讲义对应小节读一遍，再回来对着这页复述一次——能讲出来才算真懂。&lt;/text&gt;&#13;&#10;            &lt;text x='64' y='684' fontSize='13' fill='#8A9AAA' fontFamily='Microsoft YaHei'&gt;Python 讲授课件 · 逐节版&lt;/text&gt;&#13;&#10;            &lt;text x='1216' y='684' fontSize='13' fill='#8A9AAA' textAnchor='end' fontFamily='Microsoft YaHei'&gt;单元 7 · 第 35 节&lt;/text&gt;&#13;&#10;        &lt;/svg&gt;&#13;&#10;    &lt;/Box&gt;&#13;&#10;&lt;/Slide&gt;&#13;&#10;"/>
+        <p:cNvPr id="94" name="" descr="&lt;Slide style={{ width: '1280px', height: '720px', backgroundColor: '#FAFCFE', padding: 0, position: 'relative', overflow: 'hidden' }}&gt;&#13;&#10;    &lt;Box style={{ position: 'absolute', left: 64, top: 36, width: '1152px', flexDirection: 'row', alignItems: 'center', gap: 12 }}&gt;&#13;&#10;        &lt;Box style={{ background: '#0E9B78', borderRadius: 5, padding: '3px 11px' }}&gt;&#13;&#10;            &lt;Text style={{ fontSize: 14, fontWeight: 'bold', color: '#FFFFFF' }}&gt;第 35 节&lt;/Text&gt;&#13;&#10;        &lt;/Box&gt;&#13;&#10;        &lt;Text style={{ fontSize: 30, fontWeight: 'bold', color: '#16232E' }}&gt;核心知识点&lt;/Text&gt;&#13;&#10;        &lt;Text style={{ fontSize: 15, color: '#5A6B7A', marginTop: 10 }}&gt;· 作用域与函数是一等公民&lt;/Text&gt;&#13;&#10;    &lt;/Box&gt;&#13;&#10;    &lt;Box style={{ position: 'absolute', left: 0, top: 0, width: '1280px', height: '720px' }}&gt;&#13;&#10;        &lt;svg width='1280' height='720' viewBox='0 0 1280 720'&gt;&#13;&#10;            &lt;rect x='64' y='96' width='368' height='330' rx='12' fill='#FFFFFF' stroke='#D8E3EE' /&gt;&lt;rect x='64' y='96' width='368' height='4' rx='2' fill='#1F5FA8' /&gt;&lt;text x='82' y='130' fontSize='15.5' fontWeight='bold' fill='#1F5FA8' textAnchor='start' fontFamily='Microsoft YaHei'&gt;2.5 作用域：谁能看见谁&lt;/text&gt;&lt;text x='82' y='169.0' fontSize='13' fill='#3A4A58' textAnchor='start' fontFamily='Microsoft YaHei'&gt;· 函数内定义的变量是局部变量，只在函数内可见，&lt;/text&gt;&lt;text x='82' y='188.5' fontSize='13' fill='#3A4A58' textAnchor='start' fontFamily='Microsoft YaHei'&gt;函数结束就消失。&lt;/text&gt;&lt;text x='82' y='217.0' fontSize='13' fill='#3A4A58' textAnchor='start' fontFamily='Microsoft YaHei'&gt;· 函数可以读取全局变量，但不推荐修改全局变量。&lt;/text&gt;&lt;text x='82' y='245.5' fontSize='13' fill='#3A4A58' textAnchor='start' fontFamily='Microsoft YaHei'&gt;· 函数内如果要给一个名字赋值，Python&lt;/text&gt;&lt;text x='82' y='265.0' fontSize='13' fill='#3A4A58' textAnchor='start' fontFamily='Microsoft YaHei'&gt;就认为它是局部的（不会去改全局的那个）。&lt;/text&gt;&lt;rect x='468' y='96' width='368' height='330' rx='12' fill='#FFFFFF' stroke='#D8E3EE' /&gt;&lt;rect x='468' y='96' width='368' height='4' rx='2' fill='#1F5FA8' /&gt;&lt;text x='486' y='130' fontSize='15.5' fontWeight='bold' fill='#1F5FA8' textAnchor='start' fontFamily='Microsoft YaHei'&gt;2.6 函数是&quot;一等公民&quot;&lt;/text&gt;&lt;text x='486' y='169.0' fontSize='13' fill='#3A4A58' textAnchor='start' fontFamily='Microsoft YaHei'&gt;· 赋给变量：double = lambda x: x 2（lambda&lt;/text&gt;&lt;text x='486' y='188.5' fontSize='13' fill='#3A4A58' textAnchor='start' fontFamily='Microsoft YaHei'&gt;就是&quot;一次性小函数&quot;）&lt;/text&gt;&lt;text x='486' y='217.0' fontSize='13' fill='#3A4A58' textAnchor='start' fontFamily='Microsoft YaHei'&gt;· 当参数传给别的函数：sorted(scores,&lt;/text&gt;&lt;text x='486' y='236.5' fontSize='13' fill='#3A4A58' textAnchor='start' fontFamily='Microsoft YaHei'&gt;key=scores.get)&lt;/text&gt;&lt;text x='486' y='265.0' fontSize='13' fill='#3A4A58' textAnchor='start' fontFamily='Microsoft YaHei'&gt;· 放进列表：operations = [加, 减, 乘]&lt;/text&gt;&lt;rect x='872' y='96' width='368' height='330' rx='12' fill='#FFFFFF' stroke='#D8E3EE' /&gt;&lt;rect x='872' y='96' width='368' height='4' rx='2' fill='#1F5FA8' /&gt;&lt;text x='890' y='130' fontSize='15.5' fontWeight='bold' fill='#1F5FA8' textAnchor='start' fontFamily='Microsoft YaHei'&gt;2.7 把函数存进模块（教材 8.6）&lt;/text&gt;&lt;text x='890' y='169.0' fontSize='13' fill='#3A4A58' textAnchor='start' fontFamily='Microsoft YaHei'&gt;· 最小的模块就是两个文件。&lt;/text&gt;&lt;text x='890' y='197.5' fontSize='13' fill='#3A4A58' textAnchor='start' fontFamily='Microsoft YaHei'&gt;· if __name__ == &quot;__main__&quot;: 到底在防什么？&lt;/text&gt;&lt;text x='890' y='226.0' fontSize='13' fill='#3A4A58' textAnchor='start' fontFamily='Microsoft YaHei'&gt;· 直接运行这个文件时，__name__ 的值是&lt;/text&gt;&lt;text x='890' y='245.5' fontSize='13' fill='#3A4A58' textAnchor='start' fontFamily='Microsoft YaHei'&gt;&quot;__main__&quot;；&lt;/text&gt;&lt;rect x='64' y='574' width='1152' height='66' rx='12' fill='#EEF5FB' /&gt;&lt;text x='84' y='616' fontSize='14' fill='#243444' textAnchor='start' fontFamily='Microsoft YaHei'&gt;看不懂的地方先回讲义对应小节读一遍，再回来对着这页复述一次——能讲出来才算真懂。&lt;/text&gt;&#13;&#10;            &lt;text x='64' y='684' fontSize='13' fill='#8A9AAA' fontFamily='Microsoft YaHei'&gt;Python 讲授课件 · 逐节版&lt;/text&gt;&#13;&#10;            &lt;text x='1216' y='684' fontSize='13' fill='#8A9AAA' textAnchor='end' fontFamily='Microsoft YaHei'&gt;单元 7 · 第 35 节&lt;/text&gt;&#13;&#10;        &lt;/svg&gt;&#13;&#10;    &lt;/Box&gt;&#13;&#10;&lt;/Slide&gt;&#13;&#10;"/>
         <p:cNvGrpSpPr/>
         <p:nvPr/>
       </p:nvGrpSpPr>

--- a/python-course-ppt/逐节课件/Python讲授课件-单元07.pptx
+++ b/python-course-ppt/逐节课件/Python讲授课件-单元07.pptx
@@ -559,7 +559,7 @@
   <p:cSld>
     <p:spTree>
       <p:nvGrpSpPr>
-        <p:cNvPr id="1" name="" descr="&lt;Slide style={{ width: '1280px', height: '720px', backgroundColor: '#FAFCFE', padding: 0, position: 'relative', overflow: 'hidden' }}&gt;&#13;&#10;    &lt;Box style={{ position: 'absolute', left: 0, top: 0, width: '1280px', height: '150px', background: '#1F5FA8' }} /&gt;&#13;&#10;    &lt;Box style={{ position: 'absolute', left: 64, top: 34, width: '1152px', flexDirection: 'column' }}&gt;&#13;&#10;        &lt;Text style={{ fontSize: 15, fontWeight: 'bold', color: '#BFD9F2', letterSpacing: 2 }}&gt;阶段 1 · 单元 7&lt;/Text&gt;&#13;&#10;        &lt;Text style={{ fontSize: 38, fontWeight: 'bold', color: '#FFFFFF', marginTop: 6 }}&gt;函数&lt;/Text&gt;&#13;&#10;    &lt;/Box&gt;&#13;&#10;    &lt;Box style={{ position: 'absolute', left: 64, top: 168, width: '1152px', height: 470 }}&gt;&#13;&#10;        &lt;svg width='1152' height='470' viewBox='0 0 1152 470'&gt;&#13;&#10;            &lt;text x='0' y='18' fontSize='15' fontWeight='bold' fill='#16232E' fontFamily='Microsoft YaHei'&gt;本单元共 7 节课&lt;/text&gt;&#13;&#10;            &lt;rect x='0' y='196' width='1152' height='38' rx='7' fill='#FFFFFF' /&gt;&lt;text x='16' y='221' fontSize='15' fontWeight='bold' fill='#1F5FA8' fontFamily='Microsoft YaHei'&gt;第 33 节&lt;/text&gt;&lt;text x='96' y='221' fontSize='15' fill='#16232E' fontFamily='Microsoft YaHei'&gt;定义函数与 return&lt;/text&gt;&lt;text x='1080' y='221' fontSize='13' fill='#5A6B7A' textAnchor='end' fontFamily='Microsoft YaHei'&gt;W7&lt;/text&gt;&lt;rect x='0' y='238' width='1152' height='38' rx='7' fill='#F2F7FD' /&gt;&lt;text x='16' y='263' fontSize='15' fontWeight='bold' fill='#1F5FA8' fontFamily='Microsoft YaHei'&gt;第 34 节&lt;/text&gt;&lt;text x='96' y='263' fontSize='15' fill='#16232E' fontFamily='Microsoft YaHei'&gt;三种参数写法与★ 参数传递的副本语义&lt;/text&gt;&lt;text x='1080' y='263' fontSize='13' fill='#5A6B7A' textAnchor='end' fontFamily='Microsoft YaHei'&gt;W7&lt;/text&gt;&lt;rect x='0' y='280' width='1152' height='38' rx='7' fill='#FFFFFF' /&gt;&lt;text x='16' y='305' fontSize='15' fontWeight='bold' fill='#1F5FA8' fontFamily='Microsoft YaHei'&gt;第 35 节&lt;/text&gt;&lt;text x='96' y='305' fontSize='15' fill='#16232E' fontFamily='Microsoft YaHei'&gt;作用域与函数是一等公民&lt;/text&gt;&lt;text x='1080' y='305' fontSize='13' fill='#5A6B7A' textAnchor='end' fontFamily='Microsoft YaHei'&gt;W7&lt;/text&gt;&lt;rect x='0' y='322' width='1152' height='38' rx='7' fill='#F2F7FD' /&gt;&lt;text x='16' y='347' fontSize='15' fontWeight='bold' fill='#1F5FA8' fontFamily='Microsoft YaHei'&gt;第 36 节&lt;/text&gt;&lt;text x='96' y='347' fontSize='15' fill='#16232E' fontFamily='Microsoft YaHei'&gt;七个示例串讲与拆模块&lt;/text&gt;&lt;text x='1080' y='347' fontSize='13' fill='#5A6B7A' textAnchor='end' fontFamily='Microsoft YaHei'&gt;W7&lt;/text&gt;&lt;rect x='0' y='364' width='1152' height='38' rx='7' fill='#FFFFFF' /&gt;&lt;text x='16' y='389' fontSize='15' fontWeight='bold' fill='#1F5FA8' fontFamily='Microsoft YaHei'&gt;第 37 节&lt;/text&gt;&lt;text x='96' y='389' fontSize='15' fill='#16232E' fontFamily='Microsoft YaHei'&gt;动手实战与答案讲评&lt;/text&gt;&lt;text x='1080' y='389' fontSize='13' fill='#5A6B7A' textAnchor='end' fontFamily='Microsoft YaHei'&gt;W7&lt;/text&gt;&lt;rect x='0' y='406' width='1152' height='38' rx='7' fill='#F2F7FD' /&gt;&lt;text x='16' y='431' fontSize='15' fontWeight='bold' fill='#1F5FA8' fontFamily='Microsoft YaHei'&gt;第 38 节&lt;/text&gt;&lt;text x='96' y='431' fontSize='15' fill='#16232E' fontFamily='Microsoft YaHei'&gt;★ 六个常见错误逐条自查&lt;/text&gt;&lt;text x='1080' y='431' fontSize='13' fill='#5A6B7A' textAnchor='end' fontFamily='Microsoft YaHei'&gt;W7&lt;/text&gt;&lt;rect x='0' y='448' width='1152' height='38' rx='7' fill='#FFFFFF' /&gt;&lt;text x='16' y='473' fontSize='15' fontWeight='bold' fill='#1F5FA8' fontFamily='Microsoft YaHei'&gt;第 39 节&lt;/text&gt;&lt;text x='96' y='473' fontSize='15' fill='#16232E' fontFamily='Microsoft YaHei'&gt;单元 7 验收复盘&lt;/text&gt;&lt;text x='1080' y='473' fontSize='13' fill='#5A6B7A' textAnchor='end' fontFamily='Microsoft YaHei'&gt;W7&lt;/text&gt;&#13;&#10;        &lt;/svg&gt;&#13;&#10;    &lt;/Box&gt;&#13;&#10;    &lt;Box style={{ position: 'absolute', left: 64, bottom: 22, width: '1152px', flexDirection: 'row', justifyContent: 'space-between' }}&gt;&#13;&#10;        &lt;Text style={{ fontSize: 13, color: '#8A9AAA' }}&gt;Python 讲授课件 · 逐节版&lt;/Text&gt;&#13;&#10;        &lt;Text style={{ fontSize: 13, color: '#8A9AAA' }}&gt;单元 7 · 封面&lt;/Text&gt;&#13;&#10;    &lt;/Box&gt;&#13;&#10;&lt;/Slide&gt;&#13;&#10;"/>
+        <p:cNvPr id="1" name="" descr="&lt;Slide style={{ width: '1280px', height: '720px', backgroundColor: '#FAFCFE', padding: 0, position: 'relative', overflow: 'hidden' }}&gt;&#13;&#10;    &lt;Box style={{ position: 'absolute', left: 0, top: 0, width: '1280px', height: '150px', background: '#1F5FA8' }} /&gt;&#13;&#10;    &lt;Box style={{ position: 'absolute', left: 64, top: 34, width: '1152px', flexDirection: 'column' }}&gt;&#13;&#10;        &lt;Text style={{ fontSize: 15, fontWeight: 'bold', color: '#BFD9F2', letterSpacing: 2 }}&gt;阶段 1 · 单元 7&lt;/Text&gt;&#13;&#10;        &lt;Text style={{ fontSize: 38, fontWeight: 'bold', color: '#FFFFFF', marginTop: 6 }}&gt;函数&lt;/Text&gt;&#13;&#10;    &lt;/Box&gt;&#13;&#10;    &lt;Box style={{ position: 'absolute', left: 64, top: 168, width: '1152px', height: 470 }}&gt;&#13;&#10;        &lt;svg width='1152' height='470' viewBox='0 0 1152 470'&gt;&#13;&#10;            &lt;text x='0' y='18' fontSize='15' fontWeight='bold' fill='#16232E' fontFamily='Microsoft YaHei'&gt;本单元共 7 节课&lt;/text&gt;&#13;&#10;            &lt;rect x='0' y='56.0' width='1152' height='46.6' rx='7' fill='#FFFFFF' /&gt;&lt;text x='16' y='84.3' fontSize='15' fontWeight='bold' fill='#1F5FA8' fontFamily='Microsoft YaHei'&gt;第 33 节&lt;/text&gt;&lt;text x='96' y='84.3' fontSize='15' fill='#16232E' fontFamily='Microsoft YaHei'&gt;定义函数与 return&lt;/text&gt;&lt;text x='1080' y='84.3' fontSize='13' fill='#5A6B7A' textAnchor='end' fontFamily='Microsoft YaHei'&gt;W7&lt;/text&gt;&lt;rect x='0' y='112.6' width='1152' height='46.6' rx='7' fill='#F2F7FD' /&gt;&lt;text x='16' y='140.9' fontSize='15' fontWeight='bold' fill='#1F5FA8' fontFamily='Microsoft YaHei'&gt;第 34 节&lt;/text&gt;&lt;text x='96' y='140.9' fontSize='15' fill='#16232E' fontFamily='Microsoft YaHei'&gt;三种参数写法与★ 参数传递的副本语义&lt;/text&gt;&lt;text x='1080' y='140.9' fontSize='13' fill='#5A6B7A' textAnchor='end' fontFamily='Microsoft YaHei'&gt;W7&lt;/text&gt;&lt;rect x='0' y='169.1' width='1152' height='46.6' rx='7' fill='#FFFFFF' /&gt;&lt;text x='16' y='197.4' fontSize='15' fontWeight='bold' fill='#1F5FA8' fontFamily='Microsoft YaHei'&gt;第 35 节&lt;/text&gt;&lt;text x='96' y='197.4' fontSize='15' fill='#16232E' fontFamily='Microsoft YaHei'&gt;作用域与函数是一等公民&lt;/text&gt;&lt;text x='1080' y='197.4' fontSize='13' fill='#5A6B7A' textAnchor='end' fontFamily='Microsoft YaHei'&gt;W7&lt;/text&gt;&lt;rect x='0' y='225.7' width='1152' height='46.6' rx='7' fill='#F2F7FD' /&gt;&lt;text x='16' y='254.0' fontSize='15' fontWeight='bold' fill='#1F5FA8' fontFamily='Microsoft YaHei'&gt;第 36 节&lt;/text&gt;&lt;text x='96' y='254.0' fontSize='15' fill='#16232E' fontFamily='Microsoft YaHei'&gt;七个示例串讲与拆模块&lt;/text&gt;&lt;text x='1080' y='254.0' fontSize='13' fill='#5A6B7A' textAnchor='end' fontFamily='Microsoft YaHei'&gt;W7&lt;/text&gt;&lt;rect x='0' y='282.3' width='1152' height='46.6' rx='7' fill='#FFFFFF' /&gt;&lt;text x='16' y='310.6' fontSize='15' fontWeight='bold' fill='#1F5FA8' fontFamily='Microsoft YaHei'&gt;第 37 节&lt;/text&gt;&lt;text x='96' y='310.6' fontSize='15' fill='#16232E' fontFamily='Microsoft YaHei'&gt;动手实战与答案讲评&lt;/text&gt;&lt;text x='1080' y='310.6' fontSize='13' fill='#5A6B7A' textAnchor='end' fontFamily='Microsoft YaHei'&gt;W7&lt;/text&gt;&lt;rect x='0' y='338.9' width='1152' height='46.6' rx='7' fill='#F2F7FD' /&gt;&lt;text x='16' y='367.1' fontSize='15' fontWeight='bold' fill='#1F5FA8' fontFamily='Microsoft YaHei'&gt;第 38 节&lt;/text&gt;&lt;text x='96' y='367.1' fontSize='15' fill='#16232E' fontFamily='Microsoft YaHei'&gt;★ 六个常见错误逐条自查&lt;/text&gt;&lt;text x='1080' y='367.1' fontSize='13' fill='#5A6B7A' textAnchor='end' fontFamily='Microsoft YaHei'&gt;W7&lt;/text&gt;&lt;rect x='0' y='395.4' width='1152' height='46.6' rx='7' fill='#FFFFFF' /&gt;&lt;text x='16' y='423.7' fontSize='15' fontWeight='bold' fill='#1F5FA8' fontFamily='Microsoft YaHei'&gt;第 39 节&lt;/text&gt;&lt;text x='96' y='423.7' fontSize='15' fill='#16232E' fontFamily='Microsoft YaHei'&gt;单元 7 验收复盘&lt;/text&gt;&lt;text x='1080' y='423.7' fontSize='13' fill='#5A6B7A' textAnchor='end' fontFamily='Microsoft YaHei'&gt;W7&lt;/text&gt;&#13;&#10;        &lt;/svg&gt;&#13;&#10;    &lt;/Box&gt;&#13;&#10;    &lt;Box style={{ position: 'absolute', left: 64, bottom: 22, width: '1152px', flexDirection: 'row', justifyContent: 'space-between' }}&gt;&#13;&#10;        &lt;Text style={{ fontSize: 13, color: '#8A9AAA' }}&gt;Python 讲授课件 · 逐节版&lt;/Text&gt;&#13;&#10;        &lt;Text style={{ fontSize: 13, color: '#8A9AAA' }}&gt;单元 7 · 封面&lt;/Text&gt;&#13;&#10;    &lt;/Box&gt;&#13;&#10;&lt;/Slide&gt;&#13;&#10;"/>
         <p:cNvGrpSpPr/>
         <p:nvPr/>
       </p:nvGrpSpPr>
@@ -1073,7 +1073,7 @@
   <p:cSld>
     <p:spTree>
       <p:nvGrpSpPr>
-        <p:cNvPr id="15" name="" descr="&lt;Slide style={{ width: '1280px', height: '720px', backgroundColor: '#FAFCFE', padding: 0, position: 'relative', overflow: 'hidden' }}&gt;&#13;&#10;    &lt;Box style={{ position: 'absolute', left: 64, top: 36, width: '1152px', flexDirection: 'row', alignItems: 'center', gap: 12 }}&gt;&#13;&#10;        &lt;Box style={{ background: '#0E9B78', borderRadius: 5, padding: '3px 11px' }}&gt;&#13;&#10;            &lt;Text style={{ fontSize: 14, fontWeight: 'bold', color: '#FFFFFF' }}&gt;第 37 节&lt;/Text&gt;&#13;&#10;        &lt;/Box&gt;&#13;&#10;        &lt;Text style={{ fontSize: 30, fontWeight: 'bold', color: '#16232E' }}&gt;核心知识点&lt;/Text&gt;&#13;&#10;        &lt;Text style={{ fontSize: 15, color: '#5A6B7A', marginTop: 10 }}&gt;· 动手实战与答案讲评&lt;/Text&gt;&#13;&#10;    &lt;/Box&gt;&#13;&#10;    &lt;Box style={{ position: 'absolute', left: 0, top: 0, width: '1280px', height: '720px' }}&gt;&#13;&#10;        &lt;svg width='1280' height='720' viewBox='0 0 1280 720'&gt;&#13;&#10;            &lt;rect x='64' y='96' width='368' height='330' rx='12' fill='#FFFFFF' stroke='#D8E3EE' /&gt;&lt;rect x='64' y='96' width='368' height='4' rx='2' fill='#1F5FA8' /&gt;&lt;text x='82' y='130' fontSize='15.5' fontWeight='bold' fill='#1F5FA8' textAnchor='start' fontFamily='Microsoft YaHei'&gt;基础档&lt;/text&gt;&lt;text x='82' y='169.0' fontSize='13' fill='#3A4A58' textAnchor='start' fontFamily='Microsoft YaHei'&gt;· 练习 7-1【温度转换函数】&lt;/text&gt;&lt;text x='82' y='197.5' fontSize='13' fill='#3A4A58' textAnchor='start' fontFamily='Microsoft YaHei'&gt;· 练习 7-2【带默认参数的函数】&lt;/text&gt;&lt;text x='82' y='226.0' fontSize='13' fill='#3A4A58' textAnchor='start' fontFamily='Microsoft YaHei'&gt;· 必填项是 name、age、city&lt;/text&gt;&lt;rect x='468' y='96' width='368' height='330' rx='12' fill='#FFFFFF' stroke='#D8E3EE' /&gt;&lt;rect x='468' y='96' width='368' height='4' rx='2' fill='#1F5FA8' /&gt;&lt;text x='486' y='130' fontSize='15.5' fontWeight='bold' fill='#1F5FA8' textAnchor='start' fontFamily='Microsoft YaHei'&gt;进阶档&lt;/text&gt;&lt;text x='486' y='169.0' fontSize='13' fill='#3A4A58' textAnchor='start' fontFamily='Microsoft YaHei'&gt;· 练习 7-5【★ 副本语义验证实验】&lt;/text&gt;&lt;text x='486' y='197.5' fontSize='13' fill='#3A4A58' textAnchor='start' fontFamily='Microsoft YaHei'&gt;· 练习 7-6【文本统计器】&lt;/text&gt;&lt;text x='486' y='226.0' fontSize='13' fill='#3A4A58' textAnchor='start' fontFamily='Microsoft YaHei'&gt;· &quot;字符数&quot;：总长度（不含空格）&lt;/text&gt;&lt;rect x='872' y='96' width='368' height='330' rx='12' fill='#FFFFFF' stroke='#D8E3EE' /&gt;&lt;rect x='872' y='96' width='368' height='4' rx='2' fill='#1F5FA8' /&gt;&lt;text x='890' y='130' fontSize='15.5' fontWeight='bold' fill='#1F5FA8' textAnchor='start' fontFamily='Microsoft YaHei'&gt;参考答案 7-1&lt;/text&gt;&lt;text x='890' y='169.0' fontSize='13' fill='#3A4A58' textAnchor='start' fontFamily='Microsoft YaHei'&gt;· def celsius_to_fahrenheit(celsius):&lt;/text&gt;&lt;rect x='64' y='574' width='1152' height='66' rx='12' fill='#EEF5FB' /&gt;&lt;text x='84' y='616' fontSize='14' fill='#243444' textAnchor='start' fontFamily='Microsoft YaHei'&gt;看不懂的地方先回讲义对应小节读一遍，再回来对着这页复述一次——能讲出来才算真懂。&lt;/text&gt;&#13;&#10;            &lt;text x='64' y='684' fontSize='13' fill='#8A9AAA' fontFamily='Microsoft YaHei'&gt;Python 讲授课件 · 逐节版&lt;/text&gt;&#13;&#10;            &lt;text x='1216' y='684' fontSize='13' fill='#8A9AAA' textAnchor='end' fontFamily='Microsoft YaHei'&gt;单元 7 · 第 37 节&lt;/text&gt;&#13;&#10;        &lt;/svg&gt;&#13;&#10;    &lt;/Box&gt;&#13;&#10;&lt;/Slide&gt;&#13;&#10;"/>
+        <p:cNvPr id="15" name="" descr="&lt;Slide style={{ width: '1280px', height: '720px', backgroundColor: '#FAFCFE', padding: 0, position: 'relative', overflow: 'hidden' }}&gt;&#13;&#10;    &lt;Box style={{ position: 'absolute', left: 64, top: 36, width: '1152px', flexDirection: 'row', alignItems: 'center', gap: 12 }}&gt;&#13;&#10;        &lt;Box style={{ background: '#0E9B78', borderRadius: 5, padding: '3px 11px' }}&gt;&#13;&#10;            &lt;Text style={{ fontSize: 14, fontWeight: 'bold', color: '#FFFFFF' }}&gt;第 37 节&lt;/Text&gt;&#13;&#10;        &lt;/Box&gt;&#13;&#10;        &lt;Text style={{ fontSize: 30, fontWeight: 'bold', color: '#16232E' }}&gt;核心知识点&lt;/Text&gt;&#13;&#10;        &lt;Text style={{ fontSize: 15, color: '#5A6B7A', marginTop: 10 }}&gt;· 动手实战与答案讲评&lt;/Text&gt;&#13;&#10;    &lt;/Box&gt;&#13;&#10;    &lt;Box style={{ position: 'absolute', left: 0, top: 0, width: '1280px', height: '720px' }}&gt;&#13;&#10;        &lt;svg width='1280' height='720' viewBox='0 0 1280 720'&gt;&#13;&#10;            &lt;rect x='64' y='96' width='368' height='330' rx='12' fill='#FFFFFF' stroke='#D8E3EE' /&gt;&lt;rect x='64' y='96' width='368' height='4' rx='2' fill='#1F5FA8' /&gt;&lt;text x='82' y='130' fontSize='15.5' fontWeight='bold' fill='#1F5FA8' textAnchor='start' fontFamily='Microsoft YaHei'&gt;基础档&lt;/text&gt;&lt;text x='82' y='169.0' fontSize='13' fill='#3A4A58' textAnchor='start' fontFamily='Microsoft YaHei'&gt;· 练习 7-1【温度转换函数】&lt;/text&gt;&lt;text x='82' y='197.5' fontSize='13' fill='#3A4A58' textAnchor='start' fontFamily='Microsoft YaHei'&gt;· 练习 7-2【带默认参数的函数】&lt;/text&gt;&lt;text x='82' y='226.0' fontSize='13' fill='#3A4A58' textAnchor='start' fontFamily='Microsoft YaHei'&gt;· 必填项是 name、age、city&lt;/text&gt;&lt;rect x='468' y='96' width='368' height='330' rx='12' fill='#FFFFFF' stroke='#D8E3EE' /&gt;&lt;rect x='468' y='96' width='368' height='4' rx='2' fill='#1F5FA8' /&gt;&lt;text x='486' y='130' fontSize='15.5' fontWeight='bold' fill='#1F5FA8' textAnchor='start' fontFamily='Microsoft YaHei'&gt;进阶档&lt;/text&gt;&lt;text x='486' y='169.0' fontSize='13' fill='#3A4A58' textAnchor='start' fontFamily='Microsoft YaHei'&gt;· 练习 7-5【★ 副本语义验证实验】&lt;/text&gt;&lt;text x='486' y='197.5' fontSize='13' fill='#3A4A58' textAnchor='start' fontFamily='Microsoft YaHei'&gt;· 练习 7-6【文本统计器】&lt;/text&gt;&lt;text x='486' y='226.0' fontSize='13' fill='#3A4A58' textAnchor='start' fontFamily='Microsoft YaHei'&gt;· &quot;字符数&quot;：总长度（不含空格）&lt;/text&gt;&lt;rect x='872' y='96' width='368' height='330' rx='12' fill='#FFFFFF' stroke='#D8E3EE' /&gt;&lt;rect x='872' y='96' width='368' height='4' rx='2' fill='#1F5FA8' /&gt;&lt;text x='890' y='130' fontSize='15.5' fontWeight='bold' fill='#1F5FA8' textAnchor='start' fontFamily='Microsoft YaHei'&gt;参考答案 7-9&lt;/text&gt;&lt;text x='890' y='169.0' fontSize='13' fill='#3A4A58' textAnchor='start' fontFamily='Microsoft YaHei'&gt;· geometry.py 里一个 print 都没有。&lt;/text&gt;&lt;rect x='64' y='574' width='1152' height='66' rx='12' fill='#EEF5FB' /&gt;&lt;text x='84' y='616' fontSize='14' fill='#243444' textAnchor='start' fontFamily='Microsoft YaHei'&gt;看不懂的地方先回讲义对应小节读一遍，再回来对着这页复述一次——能讲出来才算真懂。&lt;/text&gt;&#13;&#10;            &lt;text x='64' y='684' fontSize='13' fill='#8A9AAA' fontFamily='Microsoft YaHei'&gt;Python 讲授课件 · 逐节版&lt;/text&gt;&#13;&#10;            &lt;text x='1216' y='684' fontSize='13' fill='#8A9AAA' textAnchor='end' fontFamily='Microsoft YaHei'&gt;单元 7 · 第 37 节&lt;/text&gt;&#13;&#10;        &lt;/svg&gt;&#13;&#10;    &lt;/Box&gt;&#13;&#10;&lt;/Slide&gt;&#13;&#10;"/>
         <p:cNvGrpSpPr/>
         <p:nvPr/>
       </p:nvGrpSpPr>
@@ -1514,7 +1514,7 @@
   <p:cSld>
     <p:spTree>
       <p:nvGrpSpPr>
-        <p:cNvPr id="28" name="" descr="&lt;Slide style={{ width: '1280px', height: '720px', backgroundColor: '#FAFCFE', padding: 0, position: 'relative', overflow: 'hidden' }}&gt;&#13;&#10;    &lt;Box style={{ position: 'absolute', left: 64, top: 36, width: '1152px', flexDirection: 'row', alignItems: 'center', gap: 12 }}&gt;&#13;&#10;        &lt;Box style={{ background: '#0E9B78', borderRadius: 5, padding: '3px 11px' }}&gt;&#13;&#10;            &lt;Text style={{ fontSize: 14, fontWeight: 'bold', color: '#FFFFFF' }}&gt;第 38 节&lt;/Text&gt;&#13;&#10;        &lt;/Box&gt;&#13;&#10;        &lt;Text style={{ fontSize: 30, fontWeight: 'bold', color: '#16232E' }}&gt;核心知识点&lt;/Text&gt;&#13;&#10;        &lt;Text style={{ fontSize: 15, color: '#5A6B7A', marginTop: 10 }}&gt;· ★ 六个常见错误逐条自查&lt;/Text&gt;&#13;&#10;    &lt;/Box&gt;&#13;&#10;    &lt;Box style={{ position: 'absolute', left: 0, top: 0, width: '1280px', height: '720px' }}&gt;&#13;&#10;        &lt;svg width='1280' height='720' viewBox='0 0 1280 720'&gt;&#13;&#10;            &lt;rect x='64' y='96' width='368' height='330' rx='12' fill='#FFFFFF' stroke='#D8E3EE' /&gt;&lt;rect x='64' y='96' width='368' height='4' rx='2' fill='#1F5FA8' /&gt;&lt;text x='82' y='130' fontSize='15.5' fontWeight='bold' fill='#1F5FA8' textAnchor='start' fontFamily='Microsoft YaHei'&gt;错误 1：忘记写冒号，或缩进错误&lt;/text&gt;&lt;text x='82' y='169.0' fontSize='13' fill='#3A4A58' textAnchor='start' fontFamily='Microsoft YaHei'&gt;· def greet(name) # 错误 1a：括号后面漏了冒号&lt;/text&gt;&lt;rect x='468' y='96' width='368' height='330' rx='12' fill='#FFFFFF' stroke='#D8E3EE' /&gt;&lt;rect x='468' y='96' width='368' height='4' rx='2' fill='#1F5FA8' /&gt;&lt;text x='486' y='130' fontSize='15.5' fontWeight='bold' fill='#1F5FA8' textAnchor='start' fontFamily='Microsoft YaHei'&gt;错误 2：★ 函数修改列表，会改到原列表&lt;/text&gt;&lt;text x='486' y='169.0' fontSize='13' fill='#3A4A58' textAnchor='start' fontFamily='Microsoft YaHei'&gt;· def add_item(items):&lt;/text&gt;&lt;rect x='872' y='96' width='368' height='330' rx='12' fill='#FFFFFF' stroke='#D8E3EE' /&gt;&lt;rect x='872' y='96' width='368' height='4' rx='2' fill='#1F5FA8' /&gt;&lt;text x='890' y='130' fontSize='15.5' fontWeight='bold' fill='#1F5FA8' textAnchor='start' fontFamily='Microsoft YaHei'&gt;错误 3：默认参数用了可变对象&lt;/text&gt;&lt;text x='890' y='169.0' fontSize='13' fill='#3A4A58' textAnchor='start' fontFamily='Microsoft YaHei'&gt;· def add_task(task, todo=[]): # 错误：&lt;/text&gt;&lt;text x='890' y='188.5' fontSize='13' fill='#3A4A58' textAnchor='start' fontFamily='Microsoft YaHei'&gt;默认值是列表！&lt;/text&gt;&lt;rect x='64' y='574' width='1152' height='66' rx='12' fill='#EEF5FB' /&gt;&lt;text x='84' y='616' fontSize='14' fill='#243444' textAnchor='start' fontFamily='Microsoft YaHei'&gt;看不懂的地方先回讲义对应小节读一遍，再回来对着这页复述一次——能讲出来才算真懂。&lt;/text&gt;&#13;&#10;            &lt;text x='64' y='684' fontSize='13' fill='#8A9AAA' fontFamily='Microsoft YaHei'&gt;Python 讲授课件 · 逐节版&lt;/text&gt;&#13;&#10;            &lt;text x='1216' y='684' fontSize='13' fill='#8A9AAA' textAnchor='end' fontFamily='Microsoft YaHei'&gt;单元 7 · 第 38 节&lt;/text&gt;&#13;&#10;        &lt;/svg&gt;&#13;&#10;    &lt;/Box&gt;&#13;&#10;&lt;/Slide&gt;&#13;&#10;"/>
+        <p:cNvPr id="28" name="" descr="&lt;Slide style={{ width: '1280px', height: '720px', backgroundColor: '#FAFCFE', padding: 0, position: 'relative', overflow: 'hidden' }}&gt;&#13;&#10;    &lt;Box style={{ position: 'absolute', left: 64, top: 36, width: '1152px', flexDirection: 'row', alignItems: 'center', gap: 12 }}&gt;&#13;&#10;        &lt;Box style={{ background: '#0E9B78', borderRadius: 5, padding: '3px 11px' }}&gt;&#13;&#10;            &lt;Text style={{ fontSize: 14, fontWeight: 'bold', color: '#FFFFFF' }}&gt;第 38 节&lt;/Text&gt;&#13;&#10;        &lt;/Box&gt;&#13;&#10;        &lt;Text style={{ fontSize: 30, fontWeight: 'bold', color: '#16232E' }}&gt;核心知识点&lt;/Text&gt;&#13;&#10;        &lt;Text style={{ fontSize: 15, color: '#5A6B7A', marginTop: 10 }}&gt;· ★ 六个常见错误逐条自查&lt;/Text&gt;&#13;&#10;    &lt;/Box&gt;&#13;&#10;    &lt;Box style={{ position: 'absolute', left: 0, top: 0, width: '1280px', height: '720px' }}&gt;&#13;&#10;        &lt;svg width='1280' height='720' viewBox='0 0 1280 720'&gt;&#13;&#10;            &lt;rect x='64' y='96' width='368' height='330' rx='12' fill='#FFFFFF' stroke='#D8E3EE' /&gt;&lt;rect x='64' y='96' width='368' height='4' rx='2' fill='#1F5FA8' /&gt;&lt;text x='82' y='130' fontSize='15.5' fontWeight='bold' fill='#1F5FA8' textAnchor='start' fontFamily='Microsoft YaHei'&gt;错误 1：忘记写冒号，或缩进错误&lt;/text&gt;&lt;text x='82' y='169.0' fontSize='13' fill='#3A4A58' textAnchor='start' fontFamily='Microsoft YaHei'&gt;· SyntaxError: expected ':' /&lt;/text&gt;&lt;text x='82' y='188.5' fontSize='13' fill='#3A4A58' textAnchor='start' fontFamily='Microsoft YaHei'&gt;IndentationError…&lt;/text&gt;&lt;text x='82' y='217.0' fontSize='13' fill='#3A4A58' textAnchor='start' fontFamily='Microsoft YaHei'&gt;· def 行末必须有 :；函数体所有行必须用一致的 4&lt;/text&gt;&lt;text x='82' y='236.5' fontSize='13' fill='#3A4A58' textAnchor='start' fontFamily='Microsoft YaHei'&gt;个空格缩进。&lt;/text&gt;&lt;text x='82' y='265.0' fontSize='13' fill='#3A4A58' textAnchor='start' fontFamily='Microsoft YaHei'&gt;· VS Code 里按 Tab 会自动插入 4 空格，不要混用&lt;/text&gt;&lt;text x='82' y='284.5' fontSize='13' fill='#3A4A58' textAnchor='start' fontFamily='Microsoft YaHei'&gt;Tab。&lt;/text&gt;&lt;rect x='468' y='96' width='368' height='330' rx='12' fill='#FFFFFF' stroke='#D8E3EE' /&gt;&lt;rect x='468' y='96' width='368' height='4' rx='2' fill='#1F5FA8' /&gt;&lt;text x='486' y='130' fontSize='15.5' fontWeight='bold' fill='#1F5FA8' textAnchor='start' fontFamily='Microsoft YaHei'&gt;错误 2：★ 函数修改列表，会改到原列表&lt;/text&gt;&lt;text x='486' y='169.0' fontSize='13' fill='#3A4A58' textAnchor='start' fontFamily='Microsoft YaHei'&gt;· 函数返回后，原列表莫名其妙多了东西；&lt;/text&gt;&lt;text x='486' y='188.5' fontSize='13' fill='#3A4A58' textAnchor='start' fontFamily='Microsoft YaHei'&gt;或者多个函数调用之间数据互相串味。&lt;/text&gt;&lt;text x='486' y='217.0' fontSize='13' fill='#3A4A58' textAnchor='start' fontFamily='Microsoft YaHei'&gt;· 列表是可变对象，Python 传的是&quot;地址&quot;，&lt;/text&gt;&lt;text x='486' y='236.5' fontSize='13' fill='#3A4A58' textAnchor='start' fontFamily='Microsoft YaHei'&gt;函数里改的就是原件。&lt;/text&gt;&lt;rect x='872' y='96' width='368' height='330' rx='12' fill='#FFFFFF' stroke='#D8E3EE' /&gt;&lt;rect x='872' y='96' width='368' height='4' rx='2' fill='#1F5FA8' /&gt;&lt;text x='890' y='130' fontSize='15.5' fontWeight='bold' fill='#1F5FA8' textAnchor='start' fontFamily='Microsoft YaHei'&gt;错误 3：默认参数用了可变对象&lt;/text&gt;&lt;text x='890' y='169.0' fontSize='13' fill='#3A4A58' textAnchor='start' fontFamily='Microsoft YaHei'&gt;· 单独调用正常，反复调用时结果里出现了前面调用的数据。&lt;/text&gt;&lt;text x='890' y='197.5' fontSize='13' fill='#3A4A58' textAnchor='start' fontFamily='Microsoft YaHei'&gt;· 默认参数在函数定义时只求值一次，&lt;/text&gt;&lt;text x='890' y='217.0' fontSize='13' fill='#3A4A58' textAnchor='start' fontFamily='Microsoft YaHei'&gt;那个列表被所有调用共享。&lt;/text&gt;&lt;rect x='64' y='574' width='1152' height='66' rx='12' fill='#EEF5FB' /&gt;&lt;text x='84' y='616' fontSize='14' fill='#243444' textAnchor='start' fontFamily='Microsoft YaHei'&gt;看不懂的地方先回讲义对应小节读一遍，再回来对着这页复述一次——能讲出来才算真懂。&lt;/text&gt;&#13;&#10;            &lt;text x='64' y='684' fontSize='13' fill='#8A9AAA' fontFamily='Microsoft YaHei'&gt;Python 讲授课件 · 逐节版&lt;/text&gt;&#13;&#10;            &lt;text x='1216' y='684' fontSize='13' fill='#8A9AAA' textAnchor='end' fontFamily='Microsoft YaHei'&gt;单元 7 · 第 38 节&lt;/text&gt;&#13;&#10;        &lt;/svg&gt;&#13;&#10;    &lt;/Box&gt;&#13;&#10;&lt;/Slide&gt;&#13;&#10;"/>
         <p:cNvGrpSpPr/>
         <p:nvPr/>
       </p:nvGrpSpPr>
@@ -3016,7 +3016,7 @@
   <p:cSld>
     <p:spTree>
       <p:nvGrpSpPr>
-        <p:cNvPr id="68" name="" descr="&lt;Slide style={{ width: '1280px', height: '720px', backgroundColor: '#FAFCFE', padding: 0, position: 'relative', overflow: 'hidden' }}&gt;&#13;&#10;    &lt;Box style={{ position: 'absolute', left: 64, top: 36, width: '1152px', flexDirection: 'row', alignItems: 'center', gap: 12 }}&gt;&#13;&#10;        &lt;Box style={{ background: '#0E9B78', borderRadius: 5, padding: '3px 11px' }}&gt;&#13;&#10;            &lt;Text style={{ fontSize: 14, fontWeight: 'bold', color: '#FFFFFF' }}&gt;第 33 节&lt;/Text&gt;&#13;&#10;        &lt;/Box&gt;&#13;&#10;        &lt;Text style={{ fontSize: 30, fontWeight: 'bold', color: '#16232E' }}&gt;核心知识点&lt;/Text&gt;&#13;&#10;        &lt;Text style={{ fontSize: 15, color: '#5A6B7A', marginTop: 10 }}&gt;· 定义函数与 return&lt;/Text&gt;&#13;&#10;    &lt;/Box&gt;&#13;&#10;    &lt;Box style={{ position: 'absolute', left: 0, top: 0, width: '1280px', height: '720px' }}&gt;&#13;&#10;        &lt;svg width='1280' height='720' viewBox='0 0 1280 720'&gt;&#13;&#10;            &lt;rect x='64' y='96' width='548' height='330' rx='12' fill='#FFFFFF' stroke='#D8E3EE' /&gt;&lt;rect x='64' y='96' width='548' height='4' rx='2' fill='#1F5FA8' /&gt;&lt;text x='82' y='130' fontSize='15.5' fontWeight='bold' fill='#1F5FA8' textAnchor='start' fontFamily='Microsoft YaHei'&gt;2.1 函数：给一段代码起个名字&lt;/text&gt;&lt;text x='82' y='169.0' fontSize='13' fill='#3A4A58' textAnchor='start' fontFamily='Microsoft YaHei'&gt;· 没有函数时，计算 BMI 的代码要在不同地方重复写三遍：&lt;/text&gt;&lt;rect x='668' y='96' width='548' height='330' rx='12' fill='#FFFFFF' stroke='#D8E3EE' /&gt;&lt;rect x='668' y='96' width='548' height='4' rx='2' fill='#1F5FA8' /&gt;&lt;text x='686' y='130' fontSize='15.5' fontWeight='bold' fill='#1F5FA8' textAnchor='start' fontFamily='Microsoft YaHei'&gt;2.2 return：把结果&quot;递出窗口&quot;&lt;/text&gt;&lt;text x='686' y='169.0' fontSize='13' fill='#3A4A58' textAnchor='start' fontFamily='Microsoft YaHei'&gt;· 有 return 和没 return 的本质区别&lt;/text&gt;&lt;text x='686' y='197.5' fontSize='13' fill='#3A4A58' textAnchor='start' fontFamily='Microsoft YaHei'&gt;· 两条极重要的规则&lt;/text&gt;&lt;rect x='64' y='574' width='1152' height='66' rx='12' fill='#EEF5FB' /&gt;&lt;text x='84' y='616' fontSize='14' fill='#243444' textAnchor='start' fontFamily='Microsoft YaHei'&gt;看不懂的地方先回讲义对应小节读一遍，再回来对着这页复述一次——能讲出来才算真懂。&lt;/text&gt;&#13;&#10;            &lt;text x='64' y='684' fontSize='13' fill='#8A9AAA' fontFamily='Microsoft YaHei'&gt;Python 讲授课件 · 逐节版&lt;/text&gt;&#13;&#10;            &lt;text x='1216' y='684' fontSize='13' fill='#8A9AAA' textAnchor='end' fontFamily='Microsoft YaHei'&gt;单元 7 · 第 33 节&lt;/text&gt;&#13;&#10;        &lt;/svg&gt;&#13;&#10;    &lt;/Box&gt;&#13;&#10;&lt;/Slide&gt;&#13;&#10;"/>
+        <p:cNvPr id="68" name="" descr="&lt;Slide style={{ width: '1280px', height: '720px', backgroundColor: '#FAFCFE', padding: 0, position: 'relative', overflow: 'hidden' }}&gt;&#13;&#10;    &lt;Box style={{ position: 'absolute', left: 64, top: 36, width: '1152px', flexDirection: 'row', alignItems: 'center', gap: 12 }}&gt;&#13;&#10;        &lt;Box style={{ background: '#0E9B78', borderRadius: 5, padding: '3px 11px' }}&gt;&#13;&#10;            &lt;Text style={{ fontSize: 14, fontWeight: 'bold', color: '#FFFFFF' }}&gt;第 33 节&lt;/Text&gt;&#13;&#10;        &lt;/Box&gt;&#13;&#10;        &lt;Text style={{ fontSize: 30, fontWeight: 'bold', color: '#16232E' }}&gt;核心知识点&lt;/Text&gt;&#13;&#10;        &lt;Text style={{ fontSize: 15, color: '#5A6B7A', marginTop: 10 }}&gt;· 定义函数与 return&lt;/Text&gt;&#13;&#10;    &lt;/Box&gt;&#13;&#10;    &lt;Box style={{ position: 'absolute', left: 0, top: 0, width: '1280px', height: '720px' }}&gt;&#13;&#10;        &lt;svg width='1280' height='720' viewBox='0 0 1280 720'&gt;&#13;&#10;            &lt;rect x='64' y='96' width='548' height='330' rx='12' fill='#FFFFFF' stroke='#D8E3EE' /&gt;&lt;rect x='64' y='96' width='548' height='4' rx='2' fill='#1F5FA8' /&gt;&lt;text x='82' y='130' fontSize='15.5' fontWeight='bold' fill='#1F5FA8' textAnchor='start' fontFamily='Microsoft YaHei'&gt;2.1 函数：给一段代码起个名字&lt;/text&gt;&lt;text x='82' y='169.0' fontSize='13' fill='#3A4A58' textAnchor='start' fontFamily='Microsoft YaHei'&gt;· 函数就像「饺子机」——你把原料（参数）放进去，按下按钮（调用），&lt;/text&gt;&lt;text x='82' y='188.5' fontSize='13' fill='#3A4A58' textAnchor='start' fontFamily='Microsoft YaHei'&gt;机器产出饺子（返回值）。&lt;/text&gt;&lt;text x='82' y='217.0' fontSize='13' fill='#3A4A58' textAnchor='start' fontFamily='Microsoft YaHei'&gt;· 1. def 和函数名之间有空格（def 函数名，不是 def函数名）&lt;/text&gt;&lt;text x='82' y='245.5' fontSize='13' fill='#3A4A58' textAnchor='start' fontFamily='Microsoft YaHei'&gt;· 2. 括号后面必须有冒号&lt;/text&gt;&lt;rect x='668' y='96' width='548' height='330' rx='12' fill='#FFFFFF' stroke='#D8E3EE' /&gt;&lt;rect x='668' y='96' width='548' height='4' rx='2' fill='#1F5FA8' /&gt;&lt;text x='686' y='130' fontSize='15.5' fontWeight='bold' fill='#1F5FA8' textAnchor='start' fontFamily='Microsoft YaHei'&gt;2.2 return：把结果&quot;递出窗口&quot;&lt;/text&gt;&lt;text x='686' y='169.0' fontSize='13' fill='#3A4A58' textAnchor='start' fontFamily='Microsoft YaHei'&gt;· 有 return 和没 return 的本质区别&lt;/text&gt;&lt;text x='686' y='197.5' fontSize='13' fill='#3A4A58' textAnchor='start' fontFamily='Microsoft YaHei'&gt;· 两条极重要的规则&lt;/text&gt;&lt;rect x='64' y='574' width='1152' height='66' rx='12' fill='#EEF5FB' /&gt;&lt;text x='84' y='616' fontSize='14' fill='#243444' textAnchor='start' fontFamily='Microsoft YaHei'&gt;看不懂的地方先回讲义对应小节读一遍，再回来对着这页复述一次——能讲出来才算真懂。&lt;/text&gt;&#13;&#10;            &lt;text x='64' y='684' fontSize='13' fill='#8A9AAA' fontFamily='Microsoft YaHei'&gt;Python 讲授课件 · 逐节版&lt;/text&gt;&#13;&#10;            &lt;text x='1216' y='684' fontSize='13' fill='#8A9AAA' textAnchor='end' fontFamily='Microsoft YaHei'&gt;单元 7 · 第 33 节&lt;/text&gt;&#13;&#10;        &lt;/svg&gt;&#13;&#10;    &lt;/Box&gt;&#13;&#10;&lt;/Slide&gt;&#13;&#10;"/>
         <p:cNvGrpSpPr/>
         <p:nvPr/>
       </p:nvGrpSpPr>
@@ -3477,7 +3477,7 @@
   <p:cSld>
     <p:spTree>
       <p:nvGrpSpPr>
-        <p:cNvPr id="81" name="" descr="&lt;Slide style={{ width: '1280px', height: '720px', backgroundColor: '#FAFCFE', padding: 0, position: 'relative', overflow: 'hidden' }}&gt;&#13;&#10;    &lt;Box style={{ position: 'absolute', left: 64, top: 36, width: '1152px', flexDirection: 'row', alignItems: 'center', gap: 12 }}&gt;&#13;&#10;        &lt;Box style={{ background: '#0E9B78', borderRadius: 5, padding: '3px 11px' }}&gt;&#13;&#10;            &lt;Text style={{ fontSize: 14, fontWeight: 'bold', color: '#FFFFFF' }}&gt;第 34 节&lt;/Text&gt;&#13;&#10;        &lt;/Box&gt;&#13;&#10;        &lt;Text style={{ fontSize: 30, fontWeight: 'bold', color: '#16232E' }}&gt;核心知识点&lt;/Text&gt;&#13;&#10;        &lt;Text style={{ fontSize: 15, color: '#5A6B7A', marginTop: 10 }}&gt;· 三种参数写法与★ 参数传递的副本语义&lt;/Text&gt;&#13;&#10;    &lt;/Box&gt;&#13;&#10;    &lt;Box style={{ position: 'absolute', left: 0, top: 0, width: '1280px', height: '720px' }}&gt;&#13;&#10;        &lt;svg width='1280' height='720' viewBox='0 0 1280 720'&gt;&#13;&#10;            &lt;rect x='64' y='96' width='548' height='330' rx='12' fill='#FFFFFF' stroke='#D8E3EE' /&gt;&lt;rect x='64' y='96' width='548' height='4' rx='2' fill='#1F5FA8' /&gt;&lt;text x='82' y='130' fontSize='15.5' fontWeight='bold' fill='#1F5FA8' textAnchor='start' fontFamily='Microsoft YaHei'&gt;2.3 三种参数写法&lt;/text&gt;&lt;text x='82' y='169.0' fontSize='13' fill='#3A4A58' textAnchor='start' fontFamily='Microsoft YaHei'&gt;· Python 的强制规则：有默认值的参数必须放在没有默认值的参数后面。&lt;/text&gt;&lt;rect x='668' y='96' width='548' height='330' rx='12' fill='#FFFFFF' stroke='#D8E3EE' /&gt;&lt;rect x='668' y='96' width='548' height='4' rx='2' fill='#1F5FA8' /&gt;&lt;text x='686' y='130' fontSize='15.5' fontWeight='bold' fill='#1F5FA8' textAnchor='start' fontFamily='Microsoft YaHei'&gt;2.4 ★ 参数传递的副本语义（本单元最重要的概念）&lt;/text&gt;&lt;text x='686' y='169.0' fontSize='13' fill='#3A4A58' textAnchor='start' fontFamily='Microsoft YaHei'&gt;· Python 传递参数时，传递的永远是&quot;指向数据的地址&quot;。&lt;/text&gt;&lt;text x='686' y='197.5' fontSize='13' fill='#3A4A58' textAnchor='start' fontFamily='Microsoft YaHei'&gt;· 生活化类比（务必记住这个）：&lt;/text&gt;&lt;text x='686' y='226.0' fontSize='13' fill='#3A4A58' textAnchor='start' fontFamily='Microsoft YaHei'&gt;· 三种正确的应对方式&lt;/text&gt;&lt;rect x='64' y='574' width='1152' height='66' rx='12' fill='#EEF5FB' /&gt;&lt;text x='84' y='616' fontSize='14' fill='#243444' textAnchor='start' fontFamily='Microsoft YaHei'&gt;看不懂的地方先回讲义对应小节读一遍，再回来对着这页复述一次——能讲出来才算真懂。&lt;/text&gt;&#13;&#10;            &lt;text x='64' y='684' fontSize='13' fill='#8A9AAA' fontFamily='Microsoft YaHei'&gt;Python 讲授课件 · 逐节版&lt;/text&gt;&#13;&#10;            &lt;text x='1216' y='684' fontSize='13' fill='#8A9AAA' textAnchor='end' fontFamily='Microsoft YaHei'&gt;单元 7 · 第 34 节&lt;/text&gt;&#13;&#10;        &lt;/svg&gt;&#13;&#10;    &lt;/Box&gt;&#13;&#10;&lt;/Slide&gt;&#13;&#10;"/>
+        <p:cNvPr id="81" name="" descr="&lt;Slide style={{ width: '1280px', height: '720px', backgroundColor: '#FAFCFE', padding: 0, position: 'relative', overflow: 'hidden' }}&gt;&#13;&#10;    &lt;Box style={{ position: 'absolute', left: 64, top: 36, width: '1152px', flexDirection: 'row', alignItems: 'center', gap: 12 }}&gt;&#13;&#10;        &lt;Box style={{ background: '#0E9B78', borderRadius: 5, padding: '3px 11px' }}&gt;&#13;&#10;            &lt;Text style={{ fontSize: 14, fontWeight: 'bold', color: '#FFFFFF' }}&gt;第 34 节&lt;/Text&gt;&#13;&#10;        &lt;/Box&gt;&#13;&#10;        &lt;Text style={{ fontSize: 30, fontWeight: 'bold', color: '#16232E' }}&gt;核心知识点&lt;/Text&gt;&#13;&#10;        &lt;Text style={{ fontSize: 15, color: '#5A6B7A', marginTop: 10 }}&gt;· 三种参数写法与★ 参数传递的副本语义&lt;/Text&gt;&#13;&#10;    &lt;/Box&gt;&#13;&#10;    &lt;Box style={{ position: 'absolute', left: 0, top: 0, width: '1280px', height: '720px' }}&gt;&#13;&#10;        &lt;svg width='1280' height='720' viewBox='0 0 1280 720'&gt;&#13;&#10;            &lt;rect x='64' y='96' width='548' height='330' rx='12' fill='#FFFFFF' stroke='#D8E3EE' /&gt;&lt;rect x='64' y='96' width='548' height='4' rx='2' fill='#1F5FA8' /&gt;&lt;text x='82' y='130' fontSize='15.5' fontWeight='bold' fill='#1F5FA8' textAnchor='start' fontFamily='Microsoft YaHei'&gt;2.3 三种参数写法&lt;/text&gt;&lt;text x='82' y='169.0' fontSize='13' fill='#3A4A58' textAnchor='start' fontFamily='Microsoft YaHei'&gt;· Python 的强制规则：有默认值的参数必须放在没有默认值的参数后面。&lt;/text&gt;&lt;rect x='668' y='96' width='548' height='330' rx='12' fill='#FFFFFF' stroke='#D8E3EE' /&gt;&lt;rect x='668' y='96' width='548' height='4' rx='2' fill='#1F5FA8' /&gt;&lt;text x='686' y='130' fontSize='15.5' fontWeight='bold' fill='#1F5FA8' textAnchor='start' fontFamily='Microsoft YaHei'&gt;2.4 ★ 参数传递的副本语义（本单元最重要的概念）&lt;/text&gt;&lt;text x='686' y='169.0' fontSize='13' fill='#3A4A58' textAnchor='start' fontFamily='Microsoft YaHei'&gt;· Python 传递参数时，传递的永远是&quot;指向数据的地址&quot;。&lt;/text&gt;&lt;text x='686' y='197.5' fontSize='13' fill='#3A4A58' textAnchor='start' fontFamily='Microsoft YaHei'&gt;· 三种正确的应对方式&lt;/text&gt;&lt;text x='686' y='226.0' fontSize='13' fill='#3A4A58' textAnchor='start' fontFamily='Microsoft YaHei'&gt;· 判断原则&lt;/text&gt;&lt;rect x='64' y='574' width='1152' height='66' rx='12' fill='#EEF5FB' /&gt;&lt;text x='84' y='616' fontSize='14' fill='#243444' textAnchor='start' fontFamily='Microsoft YaHei'&gt;看不懂的地方先回讲义对应小节读一遍，再回来对着这页复述一次——能讲出来才算真懂。&lt;/text&gt;&#13;&#10;            &lt;text x='64' y='684' fontSize='13' fill='#8A9AAA' fontFamily='Microsoft YaHei'&gt;Python 讲授课件 · 逐节版&lt;/text&gt;&#13;&#10;            &lt;text x='1216' y='684' fontSize='13' fill='#8A9AAA' textAnchor='end' fontFamily='Microsoft YaHei'&gt;单元 7 · 第 34 节&lt;/text&gt;&#13;&#10;        &lt;/svg&gt;&#13;&#10;    &lt;/Box&gt;&#13;&#10;&lt;/Slide&gt;&#13;&#10;"/>
         <p:cNvGrpSpPr/>
         <p:nvPr/>
       </p:nvGrpSpPr>

--- a/python-course-ppt/逐节课件/Python讲授课件-单元07.pptx
+++ b/python-course-ppt/逐节课件/Python讲授课件-单元07.pptx
@@ -240,6 +240,1716 @@
     </a:lvl9pPr>
   </p:notesStyle>
 </p:notesMaster>
+</file>
+
+<file path=ppt/notesSlides/notesSlide1.xml><?xml version="1.0" encoding="utf-8"?>
+<p:notes xmlns:a="http://schemas.openxmlformats.org/drawingml/2006/main" xmlns:p="http://schemas.openxmlformats.org/presentationml/2006/main" xmlns:r="http://schemas.openxmlformats.org/officeDocument/2006/relationships">
+  <p:cSld>
+    <p:spTree>
+      <p:nvGrpSpPr>
+        <p:cNvPr id="1" name=""/>
+        <p:cNvGrpSpPr/>
+        <p:nvPr/>
+      </p:nvGrpSpPr>
+      <p:grpSpPr>
+        <a:xfrm>
+          <a:off x="0" y="0"/>
+          <a:ext cx="0" cy="0"/>
+          <a:chOff x="0" y="0"/>
+          <a:chExt cx="0" cy="0"/>
+        </a:xfrm>
+      </p:grpSpPr>
+      <p:sp>
+        <p:nvSpPr>
+          <p:cNvPr id="2" name="讲课提示"/>
+          <p:cNvSpPr txBox="1"/>
+          <p:nvPr/>
+        </p:nvSpPr>
+        <p:spPr>
+          <a:xfrm>
+            <a:off x="457200" y="457200"/>
+            <a:ext cx="6858000" cy="4800600"/>
+          </a:xfrm>
+          <a:prstGeom prst="rect">
+            <a:avLst/>
+          </a:prstGeom>
+        </p:spPr>
+        <p:txBody>
+          <a:bodyPr wrap="square"/>
+          <a:lstStyle/>
+          <a:p>
+            <a:r>
+              <a:rPr lang="zh-CN" dirty="0"/>
+              <a:t>单元 7 · 单元 7 · 函数</a:t>
+            </a:r>
+          </a:p>
+          <a:p>
+            <a:r>
+              <a:rPr lang="zh-CN" dirty="0"/>
+              <a:t/>
+            </a:r>
+          </a:p>
+          <a:p>
+            <a:r>
+              <a:rPr lang="zh-CN" dirty="0"/>
+              <a:t>本单元包含以下课节：</a:t>
+            </a:r>
+          </a:p>
+          <a:p>
+            <a:r>
+              <a:rPr lang="zh-CN" dirty="0"/>
+              <a:t>· 第 33 节 定义函数与 return</a:t>
+            </a:r>
+          </a:p>
+          <a:p>
+            <a:r>
+              <a:rPr lang="zh-CN" dirty="0"/>
+              <a:t>· 第 34 节 三种参数写法与★ 参数传递的副本语义</a:t>
+            </a:r>
+          </a:p>
+          <a:p>
+            <a:r>
+              <a:rPr lang="zh-CN" dirty="0"/>
+              <a:t>· 第 35 节 作用域与函数是一等公民</a:t>
+            </a:r>
+          </a:p>
+          <a:p>
+            <a:r>
+              <a:rPr lang="zh-CN" dirty="0"/>
+              <a:t>· 第 36 节 七个示例串讲与拆模块</a:t>
+            </a:r>
+          </a:p>
+          <a:p>
+            <a:r>
+              <a:rPr lang="zh-CN" dirty="0"/>
+              <a:t>· 第 37 节 动手实战与答案讲评</a:t>
+            </a:r>
+          </a:p>
+          <a:p>
+            <a:r>
+              <a:rPr lang="zh-CN" dirty="0"/>
+              <a:t>· 第 38 节 ★ 六个常见错误逐条自查</a:t>
+            </a:r>
+          </a:p>
+          <a:p>
+            <a:r>
+              <a:rPr lang="zh-CN" dirty="0"/>
+              <a:t>· 第 39 节 单元 7 验收复盘</a:t>
+            </a:r>
+          </a:p>
+          <a:p>
+            <a:r>
+              <a:rPr lang="zh-CN" dirty="0"/>
+              <a:t/>
+            </a:r>
+          </a:p>
+          <a:p>
+            <a:r>
+              <a:rPr lang="zh-CN" dirty="0"/>
+              <a:t>开场用 3 分钟讲清：这个单元学完能做出什么，最后会被关卡怎么验。</a:t>
+            </a:r>
+          </a:p>
+        </p:txBody>
+      </p:sp>
+    </p:spTree>
+  </p:cSld>
+  <p:clrMapOvr>
+    <a:masterClrMapping/>
+  </p:clrMapOvr>
+</p:notes>
+</file>
+
+<file path=ppt/notesSlides/notesSlide10.xml><?xml version="1.0" encoding="utf-8"?>
+<p:notes xmlns:a="http://schemas.openxmlformats.org/drawingml/2006/main" xmlns:p="http://schemas.openxmlformats.org/presentationml/2006/main" xmlns:r="http://schemas.openxmlformats.org/officeDocument/2006/relationships">
+  <p:cSld>
+    <p:spTree>
+      <p:nvGrpSpPr>
+        <p:cNvPr id="1" name=""/>
+        <p:cNvGrpSpPr/>
+        <p:nvPr/>
+      </p:nvGrpSpPr>
+      <p:grpSpPr>
+        <a:xfrm>
+          <a:off x="0" y="0"/>
+          <a:ext cx="0" cy="0"/>
+          <a:chOff x="0" y="0"/>
+          <a:chExt cx="0" cy="0"/>
+        </a:xfrm>
+      </p:grpSpPr>
+      <p:sp>
+        <p:nvSpPr>
+          <p:cNvPr id="2" name="讲课提示"/>
+          <p:cNvSpPr txBox="1"/>
+          <p:nvPr/>
+        </p:nvSpPr>
+        <p:spPr>
+          <a:xfrm>
+            <a:off x="457200" y="457200"/>
+            <a:ext cx="6858000" cy="4800600"/>
+          </a:xfrm>
+          <a:prstGeom prst="rect">
+            <a:avLst/>
+          </a:prstGeom>
+        </p:spPr>
+        <p:txBody>
+          <a:bodyPr wrap="square"/>
+          <a:lstStyle/>
+          <a:p>
+            <a:r>
+              <a:rPr lang="zh-CN" dirty="0"/>
+              <a:t>第 37 节 · 动手实战与答案讲评</a:t>
+            </a:r>
+          </a:p>
+          <a:p>
+            <a:r>
+              <a:rPr lang="zh-CN" dirty="0"/>
+              <a:t>单元 7 · 函数 · W7–W8</a:t>
+            </a:r>
+          </a:p>
+          <a:p>
+            <a:r>
+              <a:rPr lang="zh-CN" dirty="0"/>
+              <a:t/>
+            </a:r>
+          </a:p>
+          <a:p>
+            <a:r>
+              <a:rPr lang="zh-CN" dirty="0"/>
+              <a:t>学习目标：独立完成单元 7 练习，掌握用函数重构代码</a:t>
+            </a:r>
+          </a:p>
+          <a:p>
+            <a:r>
+              <a:rPr lang="zh-CN" dirty="0"/>
+              <a:t/>
+            </a:r>
+          </a:p>
+          <a:p>
+            <a:r>
+              <a:rPr lang="zh-CN" dirty="0"/>
+              <a:t>课堂实操（40 分钟，不看答案）：</a:t>
+            </a:r>
+          </a:p>
+          <a:p>
+            <a:r>
+              <a:rPr lang="zh-CN" dirty="0"/>
+              <a:t>· 限时 30 分钟独立完成基础档</a:t>
+            </a:r>
+          </a:p>
+          <a:p>
+            <a:r>
+              <a:rPr lang="zh-CN" dirty="0"/>
+              <a:t>· 逐题对照答案讲评</a:t>
+            </a:r>
+          </a:p>
+          <a:p>
+            <a:r>
+              <a:rPr lang="zh-CN" dirty="0"/>
+              <a:t/>
+            </a:r>
+          </a:p>
+          <a:p>
+            <a:r>
+              <a:rPr lang="zh-CN" dirty="0"/>
+              <a:t>课后作业：</a:t>
+            </a:r>
+          </a:p>
+          <a:p>
+            <a:r>
+              <a:rPr lang="zh-CN" dirty="0"/>
+              <a:t>· ★ 动手项目 8.1–8.3 魔方消息 + 8.4–8.6 星际争霸 + 8.7 鸡尾酒</a:t>
+            </a:r>
+          </a:p>
+          <a:p>
+            <a:r>
+              <a:rPr lang="zh-CN" dirty="0"/>
+              <a:t>· 产出：3 个可复用函数 + 2 个自定义模块</a:t>
+            </a:r>
+          </a:p>
+          <a:p>
+            <a:r>
+              <a:rPr lang="zh-CN" dirty="0"/>
+              <a:t/>
+            </a:r>
+          </a:p>
+          <a:p>
+            <a:r>
+              <a:rPr lang="zh-CN" dirty="0"/>
+              <a:t>节奏：讲 20 分钟 → 学员自己敲 40 分钟（不看答案）→ 对讲评自查 20 分钟 → 写作业 10 分钟。</a:t>
+            </a:r>
+          </a:p>
+        </p:txBody>
+      </p:sp>
+    </p:spTree>
+  </p:cSld>
+  <p:clrMapOvr>
+    <a:masterClrMapping/>
+  </p:clrMapOvr>
+</p:notes>
+</file>
+
+<file path=ppt/notesSlides/notesSlide11.xml><?xml version="1.0" encoding="utf-8"?>
+<p:notes xmlns:a="http://schemas.openxmlformats.org/drawingml/2006/main" xmlns:p="http://schemas.openxmlformats.org/presentationml/2006/main" xmlns:r="http://schemas.openxmlformats.org/officeDocument/2006/relationships">
+  <p:cSld>
+    <p:spTree>
+      <p:nvGrpSpPr>
+        <p:cNvPr id="1" name=""/>
+        <p:cNvGrpSpPr/>
+        <p:nvPr/>
+      </p:nvGrpSpPr>
+      <p:grpSpPr>
+        <a:xfrm>
+          <a:off x="0" y="0"/>
+          <a:ext cx="0" cy="0"/>
+          <a:chOff x="0" y="0"/>
+          <a:chExt cx="0" cy="0"/>
+        </a:xfrm>
+      </p:grpSpPr>
+      <p:sp>
+        <p:nvSpPr>
+          <p:cNvPr id="2" name="讲课提示"/>
+          <p:cNvSpPr txBox="1"/>
+          <p:nvPr/>
+        </p:nvSpPr>
+        <p:spPr>
+          <a:xfrm>
+            <a:off x="457200" y="457200"/>
+            <a:ext cx="6858000" cy="4800600"/>
+          </a:xfrm>
+          <a:prstGeom prst="rect">
+            <a:avLst/>
+          </a:prstGeom>
+        </p:spPr>
+        <p:txBody>
+          <a:bodyPr wrap="square"/>
+          <a:lstStyle/>
+          <a:p>
+            <a:r>
+              <a:rPr lang="zh-CN" dirty="0"/>
+              <a:t>第 37 节 · 核心知识点：动手实战与答案讲评</a:t>
+            </a:r>
+          </a:p>
+          <a:p>
+            <a:r>
+              <a:rPr lang="zh-CN" dirty="0"/>
+              <a:t/>
+            </a:r>
+          </a:p>
+          <a:p>
+            <a:r>
+              <a:rPr lang="zh-CN" dirty="0"/>
+              <a:t>讲这一页时：先让学生说出上节课的结论，再逐块讲要点。</a:t>
+            </a:r>
+          </a:p>
+          <a:p>
+            <a:r>
+              <a:rPr lang="zh-CN" dirty="0"/>
+              <a:t>每讲完一块，问一句「这一步如果写错了，报错会长什么样？」——把错误提前讲。</a:t>
+            </a:r>
+          </a:p>
+          <a:p>
+            <a:r>
+              <a:rPr lang="zh-CN" dirty="0"/>
+              <a:t/>
+            </a:r>
+          </a:p>
+          <a:p>
+            <a:r>
+              <a:rPr lang="zh-CN" dirty="0"/>
+              <a:t>本节目标：独立完成单元 7 练习，掌握用函数重构代码</a:t>
+            </a:r>
+          </a:p>
+          <a:p>
+            <a:r>
+              <a:rPr lang="zh-CN" dirty="0"/>
+              <a:t/>
+            </a:r>
+          </a:p>
+          <a:p>
+            <a:r>
+              <a:rPr lang="zh-CN" dirty="0"/>
+              <a:t>看不到懂的地方，回讲义对应小节读一遍，再回来对着这页复述一次——能讲出来才算真懂。</a:t>
+            </a:r>
+          </a:p>
+        </p:txBody>
+      </p:sp>
+    </p:spTree>
+  </p:cSld>
+  <p:clrMapOvr>
+    <a:masterClrMapping/>
+  </p:clrMapOvr>
+</p:notes>
+</file>
+
+<file path=ppt/notesSlides/notesSlide12.xml><?xml version="1.0" encoding="utf-8"?>
+<p:notes xmlns:a="http://schemas.openxmlformats.org/drawingml/2006/main" xmlns:p="http://schemas.openxmlformats.org/presentationml/2006/main" xmlns:r="http://schemas.openxmlformats.org/officeDocument/2006/relationships">
+  <p:cSld>
+    <p:spTree>
+      <p:nvGrpSpPr>
+        <p:cNvPr id="1" name=""/>
+        <p:cNvGrpSpPr/>
+        <p:nvPr/>
+      </p:nvGrpSpPr>
+      <p:grpSpPr>
+        <a:xfrm>
+          <a:off x="0" y="0"/>
+          <a:ext cx="0" cy="0"/>
+          <a:chOff x="0" y="0"/>
+          <a:chExt cx="0" cy="0"/>
+        </a:xfrm>
+      </p:grpSpPr>
+      <p:sp>
+        <p:nvSpPr>
+          <p:cNvPr id="2" name="讲课提示"/>
+          <p:cNvSpPr txBox="1"/>
+          <p:nvPr/>
+        </p:nvSpPr>
+        <p:spPr>
+          <a:xfrm>
+            <a:off x="457200" y="457200"/>
+            <a:ext cx="6858000" cy="4800600"/>
+          </a:xfrm>
+          <a:prstGeom prst="rect">
+            <a:avLst/>
+          </a:prstGeom>
+        </p:spPr>
+        <p:txBody>
+          <a:bodyPr wrap="square"/>
+          <a:lstStyle/>
+          <a:p>
+            <a:r>
+              <a:rPr lang="zh-CN" dirty="0"/>
+              <a:t>第 38 节 · ★ 六个常见错误逐条自查</a:t>
+            </a:r>
+          </a:p>
+          <a:p>
+            <a:r>
+              <a:rPr lang="zh-CN" dirty="0"/>
+              <a:t>单元 7 · 函数 · W7–W8</a:t>
+            </a:r>
+          </a:p>
+          <a:p>
+            <a:r>
+              <a:rPr lang="zh-CN" dirty="0"/>
+              <a:t/>
+            </a:r>
+          </a:p>
+          <a:p>
+            <a:r>
+              <a:rPr lang="zh-CN" dirty="0"/>
+              <a:t>学习目标：能对照错误清单逐条自查，把函数相关的坑全部避开</a:t>
+            </a:r>
+          </a:p>
+          <a:p>
+            <a:r>
+              <a:rPr lang="zh-CN" dirty="0"/>
+              <a:t/>
+            </a:r>
+          </a:p>
+          <a:p>
+            <a:r>
+              <a:rPr lang="zh-CN" dirty="0"/>
+              <a:t>课堂实操（40 分钟，不看答案）：</a:t>
+            </a:r>
+          </a:p>
+          <a:p>
+            <a:r>
+              <a:rPr lang="zh-CN" dirty="0"/>
+              <a:t>· 逐条现场制造并修复 6 个错误</a:t>
+            </a:r>
+          </a:p>
+          <a:p>
+            <a:r>
+              <a:rPr lang="zh-CN" dirty="0"/>
+              <a:t>· 重点讲透「默认参数用了可变对象」</a:t>
+            </a:r>
+          </a:p>
+          <a:p>
+            <a:r>
+              <a:rPr lang="zh-CN" dirty="0"/>
+              <a:t/>
+            </a:r>
+          </a:p>
+          <a:p>
+            <a:r>
+              <a:rPr lang="zh-CN" dirty="0"/>
+              <a:t>课后作业：</a:t>
+            </a:r>
+          </a:p>
+          <a:p>
+            <a:r>
+              <a:rPr lang="zh-CN" dirty="0"/>
+              <a:t>· 把 6 个错误各写一个最小复现</a:t>
+            </a:r>
+          </a:p>
+          <a:p>
+            <a:r>
+              <a:rPr lang="zh-CN" dirty="0"/>
+              <a:t/>
+            </a:r>
+          </a:p>
+          <a:p>
+            <a:r>
+              <a:rPr lang="zh-CN" dirty="0"/>
+              <a:t>节奏：讲 20 分钟 → 学员自己敲 40 分钟（不看答案）→ 对讲评自查 20 分钟 → 写作业 10 分钟。</a:t>
+            </a:r>
+          </a:p>
+        </p:txBody>
+      </p:sp>
+    </p:spTree>
+  </p:cSld>
+  <p:clrMapOvr>
+    <a:masterClrMapping/>
+  </p:clrMapOvr>
+</p:notes>
+</file>
+
+<file path=ppt/notesSlides/notesSlide13.xml><?xml version="1.0" encoding="utf-8"?>
+<p:notes xmlns:a="http://schemas.openxmlformats.org/drawingml/2006/main" xmlns:p="http://schemas.openxmlformats.org/presentationml/2006/main" xmlns:r="http://schemas.openxmlformats.org/officeDocument/2006/relationships">
+  <p:cSld>
+    <p:spTree>
+      <p:nvGrpSpPr>
+        <p:cNvPr id="1" name=""/>
+        <p:cNvGrpSpPr/>
+        <p:nvPr/>
+      </p:nvGrpSpPr>
+      <p:grpSpPr>
+        <a:xfrm>
+          <a:off x="0" y="0"/>
+          <a:ext cx="0" cy="0"/>
+          <a:chOff x="0" y="0"/>
+          <a:chExt cx="0" cy="0"/>
+        </a:xfrm>
+      </p:grpSpPr>
+      <p:sp>
+        <p:nvSpPr>
+          <p:cNvPr id="2" name="讲课提示"/>
+          <p:cNvSpPr txBox="1"/>
+          <p:nvPr/>
+        </p:nvSpPr>
+        <p:spPr>
+          <a:xfrm>
+            <a:off x="457200" y="457200"/>
+            <a:ext cx="6858000" cy="4800600"/>
+          </a:xfrm>
+          <a:prstGeom prst="rect">
+            <a:avLst/>
+          </a:prstGeom>
+        </p:spPr>
+        <p:txBody>
+          <a:bodyPr wrap="square"/>
+          <a:lstStyle/>
+          <a:p>
+            <a:r>
+              <a:rPr lang="zh-CN" dirty="0"/>
+              <a:t>第 38 节 · 核心知识点：★ 六个常见错误逐条自查</a:t>
+            </a:r>
+          </a:p>
+          <a:p>
+            <a:r>
+              <a:rPr lang="zh-CN" dirty="0"/>
+              <a:t/>
+            </a:r>
+          </a:p>
+          <a:p>
+            <a:r>
+              <a:rPr lang="zh-CN" dirty="0"/>
+              <a:t>讲这一页时：先让学生说出上节课的结论，再逐块讲要点。</a:t>
+            </a:r>
+          </a:p>
+          <a:p>
+            <a:r>
+              <a:rPr lang="zh-CN" dirty="0"/>
+              <a:t>每讲完一块，问一句「这一步如果写错了，报错会长什么样？」——把错误提前讲。</a:t>
+            </a:r>
+          </a:p>
+          <a:p>
+            <a:r>
+              <a:rPr lang="zh-CN" dirty="0"/>
+              <a:t/>
+            </a:r>
+          </a:p>
+          <a:p>
+            <a:r>
+              <a:rPr lang="zh-CN" dirty="0"/>
+              <a:t>本节目标：能对照错误清单逐条自查，把函数相关的坑全部避开</a:t>
+            </a:r>
+          </a:p>
+          <a:p>
+            <a:r>
+              <a:rPr lang="zh-CN" dirty="0"/>
+              <a:t/>
+            </a:r>
+          </a:p>
+          <a:p>
+            <a:r>
+              <a:rPr lang="zh-CN" dirty="0"/>
+              <a:t>看不到懂的地方，回讲义对应小节读一遍，再回来对着这页复述一次——能讲出来才算真懂。</a:t>
+            </a:r>
+          </a:p>
+        </p:txBody>
+      </p:sp>
+    </p:spTree>
+  </p:cSld>
+  <p:clrMapOvr>
+    <a:masterClrMapping/>
+  </p:clrMapOvr>
+</p:notes>
+</file>
+
+<file path=ppt/notesSlides/notesSlide14.xml><?xml version="1.0" encoding="utf-8"?>
+<p:notes xmlns:a="http://schemas.openxmlformats.org/drawingml/2006/main" xmlns:p="http://schemas.openxmlformats.org/presentationml/2006/main" xmlns:r="http://schemas.openxmlformats.org/officeDocument/2006/relationships">
+  <p:cSld>
+    <p:spTree>
+      <p:nvGrpSpPr>
+        <p:cNvPr id="1" name=""/>
+        <p:cNvGrpSpPr/>
+        <p:nvPr/>
+      </p:nvGrpSpPr>
+      <p:grpSpPr>
+        <a:xfrm>
+          <a:off x="0" y="0"/>
+          <a:ext cx="0" cy="0"/>
+          <a:chOff x="0" y="0"/>
+          <a:chExt cx="0" cy="0"/>
+        </a:xfrm>
+      </p:grpSpPr>
+      <p:sp>
+        <p:nvSpPr>
+          <p:cNvPr id="2" name="讲课提示"/>
+          <p:cNvSpPr txBox="1"/>
+          <p:nvPr/>
+        </p:nvSpPr>
+        <p:spPr>
+          <a:xfrm>
+            <a:off x="457200" y="457200"/>
+            <a:ext cx="6858000" cy="4800600"/>
+          </a:xfrm>
+          <a:prstGeom prst="rect">
+            <a:avLst/>
+          </a:prstGeom>
+        </p:spPr>
+        <p:txBody>
+          <a:bodyPr wrap="square"/>
+          <a:lstStyle/>
+          <a:p>
+            <a:r>
+              <a:rPr lang="zh-CN" dirty="0"/>
+              <a:t>第 39 节 · 单元 7 验收复盘</a:t>
+            </a:r>
+          </a:p>
+          <a:p>
+            <a:r>
+              <a:rPr lang="zh-CN" dirty="0"/>
+              <a:t>单元 7 · 函数 · W7–W8</a:t>
+            </a:r>
+          </a:p>
+          <a:p>
+            <a:r>
+              <a:rPr lang="zh-CN" dirty="0"/>
+              <a:t/>
+            </a:r>
+          </a:p>
+          <a:p>
+            <a:r>
+              <a:rPr lang="zh-CN" dirty="0"/>
+              <a:t>学习目标：确认函数定义、参数、返回值、作用域、导入都过关</a:t>
+            </a:r>
+          </a:p>
+          <a:p>
+            <a:r>
+              <a:rPr lang="zh-CN" dirty="0"/>
+              <a:t/>
+            </a:r>
+          </a:p>
+          <a:p>
+            <a:r>
+              <a:rPr lang="zh-CN" dirty="0"/>
+              <a:t>课堂实操（40 分钟，不看答案）：</a:t>
+            </a:r>
+          </a:p>
+          <a:p>
+            <a:r>
+              <a:rPr lang="zh-CN" dirty="0"/>
+              <a:t>· 逐条打勾验收自测</a:t>
+            </a:r>
+          </a:p>
+          <a:p>
+            <a:r>
+              <a:rPr lang="zh-CN" dirty="0"/>
+              <a:t>· 现场把一段 30 行代码拆成 3 个函数</a:t>
+            </a:r>
+          </a:p>
+          <a:p>
+            <a:r>
+              <a:rPr lang="zh-CN" dirty="0"/>
+              <a:t/>
+            </a:r>
+          </a:p>
+          <a:p>
+            <a:r>
+              <a:rPr lang="zh-CN" dirty="0"/>
+              <a:t>课后作业：</a:t>
+            </a:r>
+          </a:p>
+          <a:p>
+            <a:r>
+              <a:rPr lang="zh-CN" dirty="0"/>
+              <a:t>· 完成本单元小结与产出检查</a:t>
+            </a:r>
+          </a:p>
+          <a:p>
+            <a:r>
+              <a:rPr lang="zh-CN" dirty="0"/>
+              <a:t/>
+            </a:r>
+          </a:p>
+          <a:p>
+            <a:r>
+              <a:rPr lang="zh-CN" dirty="0"/>
+              <a:t>节奏：讲 20 分钟 → 学员自己敲 40 分钟（不看答案）→ 对讲评自查 20 分钟 → 写作业 10 分钟。</a:t>
+            </a:r>
+          </a:p>
+        </p:txBody>
+      </p:sp>
+    </p:spTree>
+  </p:cSld>
+  <p:clrMapOvr>
+    <a:masterClrMapping/>
+  </p:clrMapOvr>
+</p:notes>
+</file>
+
+<file path=ppt/notesSlides/notesSlide15.xml><?xml version="1.0" encoding="utf-8"?>
+<p:notes xmlns:a="http://schemas.openxmlformats.org/drawingml/2006/main" xmlns:p="http://schemas.openxmlformats.org/presentationml/2006/main" xmlns:r="http://schemas.openxmlformats.org/officeDocument/2006/relationships">
+  <p:cSld>
+    <p:spTree>
+      <p:nvGrpSpPr>
+        <p:cNvPr id="1" name=""/>
+        <p:cNvGrpSpPr/>
+        <p:nvPr/>
+      </p:nvGrpSpPr>
+      <p:grpSpPr>
+        <a:xfrm>
+          <a:off x="0" y="0"/>
+          <a:ext cx="0" cy="0"/>
+          <a:chOff x="0" y="0"/>
+          <a:chExt cx="0" cy="0"/>
+        </a:xfrm>
+      </p:grpSpPr>
+      <p:sp>
+        <p:nvSpPr>
+          <p:cNvPr id="2" name="讲课提示"/>
+          <p:cNvSpPr txBox="1"/>
+          <p:nvPr/>
+        </p:nvSpPr>
+        <p:spPr>
+          <a:xfrm>
+            <a:off x="457200" y="457200"/>
+            <a:ext cx="6858000" cy="4800600"/>
+          </a:xfrm>
+          <a:prstGeom prst="rect">
+            <a:avLst/>
+          </a:prstGeom>
+        </p:spPr>
+        <p:txBody>
+          <a:bodyPr wrap="square"/>
+          <a:lstStyle/>
+          <a:p>
+            <a:r>
+              <a:rPr lang="zh-CN" dirty="0"/>
+              <a:t>第 39 节 · 核心知识点：单元 7 验收复盘</a:t>
+            </a:r>
+          </a:p>
+          <a:p>
+            <a:r>
+              <a:rPr lang="zh-CN" dirty="0"/>
+              <a:t/>
+            </a:r>
+          </a:p>
+          <a:p>
+            <a:r>
+              <a:rPr lang="zh-CN" dirty="0"/>
+              <a:t>讲这一页时：先让学生说出上节课的结论，再逐块讲要点。</a:t>
+            </a:r>
+          </a:p>
+          <a:p>
+            <a:r>
+              <a:rPr lang="zh-CN" dirty="0"/>
+              <a:t>每讲完一块，问一句「这一步如果写错了，报错会长什么样？」——把错误提前讲。</a:t>
+            </a:r>
+          </a:p>
+          <a:p>
+            <a:r>
+              <a:rPr lang="zh-CN" dirty="0"/>
+              <a:t/>
+            </a:r>
+          </a:p>
+          <a:p>
+            <a:r>
+              <a:rPr lang="zh-CN" dirty="0"/>
+              <a:t>本节目标：确认函数定义、参数、返回值、作用域、导入都过关</a:t>
+            </a:r>
+          </a:p>
+          <a:p>
+            <a:r>
+              <a:rPr lang="zh-CN" dirty="0"/>
+              <a:t/>
+            </a:r>
+          </a:p>
+          <a:p>
+            <a:r>
+              <a:rPr lang="zh-CN" dirty="0"/>
+              <a:t>看不到懂的地方，回讲义对应小节读一遍，再回来对着这页复述一次——能讲出来才算真懂。</a:t>
+            </a:r>
+          </a:p>
+        </p:txBody>
+      </p:sp>
+    </p:spTree>
+  </p:cSld>
+  <p:clrMapOvr>
+    <a:masterClrMapping/>
+  </p:clrMapOvr>
+</p:notes>
+</file>
+
+<file path=ppt/notesSlides/notesSlide16.xml><?xml version="1.0" encoding="utf-8"?>
+<p:notes xmlns:a="http://schemas.openxmlformats.org/drawingml/2006/main" xmlns:p="http://schemas.openxmlformats.org/presentationml/2006/main" xmlns:r="http://schemas.openxmlformats.org/officeDocument/2006/relationships">
+  <p:cSld>
+    <p:spTree>
+      <p:nvGrpSpPr>
+        <p:cNvPr id="1" name=""/>
+        <p:cNvGrpSpPr/>
+        <p:nvPr/>
+      </p:nvGrpSpPr>
+      <p:grpSpPr>
+        <a:xfrm>
+          <a:off x="0" y="0"/>
+          <a:ext cx="0" cy="0"/>
+          <a:chOff x="0" y="0"/>
+          <a:chExt cx="0" cy="0"/>
+        </a:xfrm>
+      </p:grpSpPr>
+      <p:sp>
+        <p:nvSpPr>
+          <p:cNvPr id="2" name="讲课提示"/>
+          <p:cNvSpPr txBox="1"/>
+          <p:nvPr/>
+        </p:nvSpPr>
+        <p:spPr>
+          <a:xfrm>
+            <a:off x="457200" y="457200"/>
+            <a:ext cx="6858000" cy="4800600"/>
+          </a:xfrm>
+          <a:prstGeom prst="rect">
+            <a:avLst/>
+          </a:prstGeom>
+        </p:spPr>
+        <p:txBody>
+          <a:bodyPr wrap="square"/>
+          <a:lstStyle/>
+          <a:p>
+            <a:r>
+              <a:rPr lang="zh-CN" dirty="0"/>
+              <a:t>单元 7 小结 · 单元 7 · 小结</a:t>
+            </a:r>
+          </a:p>
+          <a:p>
+            <a:r>
+              <a:rPr lang="zh-CN" dirty="0"/>
+              <a:t/>
+            </a:r>
+          </a:p>
+          <a:p>
+            <a:r>
+              <a:rPr lang="zh-CN" dirty="0"/>
+              <a:t>收尾动作：让学生合上讲义，口述本单元三个最重要的结论；说不出来的，回对应课节。</a:t>
+            </a:r>
+          </a:p>
+          <a:p>
+            <a:r>
+              <a:rPr lang="zh-CN" dirty="0"/>
+              <a:t>然后当场勾一遍本单元课节的「已完成」，没打勾的进下一单元前补掉。</a:t>
+            </a:r>
+          </a:p>
+        </p:txBody>
+      </p:sp>
+    </p:spTree>
+  </p:cSld>
+  <p:clrMapOvr>
+    <a:masterClrMapping/>
+  </p:clrMapOvr>
+</p:notes>
+</file>
+
+<file path=ppt/notesSlides/notesSlide2.xml><?xml version="1.0" encoding="utf-8"?>
+<p:notes xmlns:a="http://schemas.openxmlformats.org/drawingml/2006/main" xmlns:p="http://schemas.openxmlformats.org/presentationml/2006/main" xmlns:r="http://schemas.openxmlformats.org/officeDocument/2006/relationships">
+  <p:cSld>
+    <p:spTree>
+      <p:nvGrpSpPr>
+        <p:cNvPr id="1" name=""/>
+        <p:cNvGrpSpPr/>
+        <p:nvPr/>
+      </p:nvGrpSpPr>
+      <p:grpSpPr>
+        <a:xfrm>
+          <a:off x="0" y="0"/>
+          <a:ext cx="0" cy="0"/>
+          <a:chOff x="0" y="0"/>
+          <a:chExt cx="0" cy="0"/>
+        </a:xfrm>
+      </p:grpSpPr>
+      <p:sp>
+        <p:nvSpPr>
+          <p:cNvPr id="2" name="讲课提示"/>
+          <p:cNvSpPr txBox="1"/>
+          <p:nvPr/>
+        </p:nvSpPr>
+        <p:spPr>
+          <a:xfrm>
+            <a:off x="457200" y="457200"/>
+            <a:ext cx="6858000" cy="4800600"/>
+          </a:xfrm>
+          <a:prstGeom prst="rect">
+            <a:avLst/>
+          </a:prstGeom>
+        </p:spPr>
+        <p:txBody>
+          <a:bodyPr wrap="square"/>
+          <a:lstStyle/>
+          <a:p>
+            <a:r>
+              <a:rPr lang="zh-CN" dirty="0"/>
+              <a:t>第 33 节 · 定义函数与 return</a:t>
+            </a:r>
+          </a:p>
+          <a:p>
+            <a:r>
+              <a:rPr lang="zh-CN" dirty="0"/>
+              <a:t>单元 7 · 函数 · W7</a:t>
+            </a:r>
+          </a:p>
+          <a:p>
+            <a:r>
+              <a:rPr lang="zh-CN" dirty="0"/>
+              <a:t/>
+            </a:r>
+          </a:p>
+          <a:p>
+            <a:r>
+              <a:rPr lang="zh-CN" dirty="0"/>
+              <a:t>学习目标：理解函数是「给一段代码起名字」，知道 return 才是真正的输出</a:t>
+            </a:r>
+          </a:p>
+          <a:p>
+            <a:r>
+              <a:rPr lang="zh-CN" dirty="0"/>
+              <a:t/>
+            </a:r>
+          </a:p>
+          <a:p>
+            <a:r>
+              <a:rPr lang="zh-CN" dirty="0"/>
+              <a:t>课堂实操（40 分钟，不看答案）：</a:t>
+            </a:r>
+          </a:p>
+          <a:p>
+            <a:r>
+              <a:rPr lang="zh-CN" dirty="0"/>
+              <a:t>· 把一段 10 行重复代码抽成一个函数</a:t>
+            </a:r>
+          </a:p>
+          <a:p>
+            <a:r>
+              <a:rPr lang="zh-CN" dirty="0"/>
+              <a:t>· 故意忘记 return，看函数返回什么</a:t>
+            </a:r>
+          </a:p>
+          <a:p>
+            <a:r>
+              <a:rPr lang="zh-CN" dirty="0"/>
+              <a:t/>
+            </a:r>
+          </a:p>
+          <a:p>
+            <a:r>
+              <a:rPr lang="zh-CN" dirty="0"/>
+              <a:t>课后作业：</a:t>
+            </a:r>
+          </a:p>
+          <a:p>
+            <a:r>
+              <a:rPr lang="zh-CN" dirty="0"/>
+              <a:t>· 完成动手练习 7-1 ~ 7-2</a:t>
+            </a:r>
+          </a:p>
+          <a:p>
+            <a:r>
+              <a:rPr lang="zh-CN" dirty="0"/>
+              <a:t/>
+            </a:r>
+          </a:p>
+          <a:p>
+            <a:r>
+              <a:rPr lang="zh-CN" dirty="0"/>
+              <a:t>节奏：讲 20 分钟 → 学员自己敲 40 分钟（不看答案）→ 对讲评自查 20 分钟 → 写作业 10 分钟。</a:t>
+            </a:r>
+          </a:p>
+        </p:txBody>
+      </p:sp>
+    </p:spTree>
+  </p:cSld>
+  <p:clrMapOvr>
+    <a:masterClrMapping/>
+  </p:clrMapOvr>
+</p:notes>
+</file>
+
+<file path=ppt/notesSlides/notesSlide3.xml><?xml version="1.0" encoding="utf-8"?>
+<p:notes xmlns:a="http://schemas.openxmlformats.org/drawingml/2006/main" xmlns:p="http://schemas.openxmlformats.org/presentationml/2006/main" xmlns:r="http://schemas.openxmlformats.org/officeDocument/2006/relationships">
+  <p:cSld>
+    <p:spTree>
+      <p:nvGrpSpPr>
+        <p:cNvPr id="1" name=""/>
+        <p:cNvGrpSpPr/>
+        <p:nvPr/>
+      </p:nvGrpSpPr>
+      <p:grpSpPr>
+        <a:xfrm>
+          <a:off x="0" y="0"/>
+          <a:ext cx="0" cy="0"/>
+          <a:chOff x="0" y="0"/>
+          <a:chExt cx="0" cy="0"/>
+        </a:xfrm>
+      </p:grpSpPr>
+      <p:sp>
+        <p:nvSpPr>
+          <p:cNvPr id="2" name="讲课提示"/>
+          <p:cNvSpPr txBox="1"/>
+          <p:nvPr/>
+        </p:nvSpPr>
+        <p:spPr>
+          <a:xfrm>
+            <a:off x="457200" y="457200"/>
+            <a:ext cx="6858000" cy="4800600"/>
+          </a:xfrm>
+          <a:prstGeom prst="rect">
+            <a:avLst/>
+          </a:prstGeom>
+        </p:spPr>
+        <p:txBody>
+          <a:bodyPr wrap="square"/>
+          <a:lstStyle/>
+          <a:p>
+            <a:r>
+              <a:rPr lang="zh-CN" dirty="0"/>
+              <a:t>第 33 节 · 核心知识点：定义函数与 return</a:t>
+            </a:r>
+          </a:p>
+          <a:p>
+            <a:r>
+              <a:rPr lang="zh-CN" dirty="0"/>
+              <a:t/>
+            </a:r>
+          </a:p>
+          <a:p>
+            <a:r>
+              <a:rPr lang="zh-CN" dirty="0"/>
+              <a:t>讲这一页时：先让学生说出上节课的结论，再逐块讲要点。</a:t>
+            </a:r>
+          </a:p>
+          <a:p>
+            <a:r>
+              <a:rPr lang="zh-CN" dirty="0"/>
+              <a:t>每讲完一块，问一句「这一步如果写错了，报错会长什么样？」——把错误提前讲。</a:t>
+            </a:r>
+          </a:p>
+          <a:p>
+            <a:r>
+              <a:rPr lang="zh-CN" dirty="0"/>
+              <a:t/>
+            </a:r>
+          </a:p>
+          <a:p>
+            <a:r>
+              <a:rPr lang="zh-CN" dirty="0"/>
+              <a:t>本节目标：理解函数是「给一段代码起名字」，知道 return 才是真正的输出</a:t>
+            </a:r>
+          </a:p>
+          <a:p>
+            <a:r>
+              <a:rPr lang="zh-CN" dirty="0"/>
+              <a:t/>
+            </a:r>
+          </a:p>
+          <a:p>
+            <a:r>
+              <a:rPr lang="zh-CN" dirty="0"/>
+              <a:t>看不到懂的地方，回讲义对应小节读一遍，再回来对着这页复述一次——能讲出来才算真懂。</a:t>
+            </a:r>
+          </a:p>
+        </p:txBody>
+      </p:sp>
+    </p:spTree>
+  </p:cSld>
+  <p:clrMapOvr>
+    <a:masterClrMapping/>
+  </p:clrMapOvr>
+</p:notes>
+</file>
+
+<file path=ppt/notesSlides/notesSlide4.xml><?xml version="1.0" encoding="utf-8"?>
+<p:notes xmlns:a="http://schemas.openxmlformats.org/drawingml/2006/main" xmlns:p="http://schemas.openxmlformats.org/presentationml/2006/main" xmlns:r="http://schemas.openxmlformats.org/officeDocument/2006/relationships">
+  <p:cSld>
+    <p:spTree>
+      <p:nvGrpSpPr>
+        <p:cNvPr id="1" name=""/>
+        <p:cNvGrpSpPr/>
+        <p:nvPr/>
+      </p:nvGrpSpPr>
+      <p:grpSpPr>
+        <a:xfrm>
+          <a:off x="0" y="0"/>
+          <a:ext cx="0" cy="0"/>
+          <a:chOff x="0" y="0"/>
+          <a:chExt cx="0" cy="0"/>
+        </a:xfrm>
+      </p:grpSpPr>
+      <p:sp>
+        <p:nvSpPr>
+          <p:cNvPr id="2" name="讲课提示"/>
+          <p:cNvSpPr txBox="1"/>
+          <p:nvPr/>
+        </p:nvSpPr>
+        <p:spPr>
+          <a:xfrm>
+            <a:off x="457200" y="457200"/>
+            <a:ext cx="6858000" cy="4800600"/>
+          </a:xfrm>
+          <a:prstGeom prst="rect">
+            <a:avLst/>
+          </a:prstGeom>
+        </p:spPr>
+        <p:txBody>
+          <a:bodyPr wrap="square"/>
+          <a:lstStyle/>
+          <a:p>
+            <a:r>
+              <a:rPr lang="zh-CN" dirty="0"/>
+              <a:t>第 34 节 · 三种参数写法与★ 参数传递的副本语义</a:t>
+            </a:r>
+          </a:p>
+          <a:p>
+            <a:r>
+              <a:rPr lang="zh-CN" dirty="0"/>
+              <a:t>单元 7 · 函数 · W7</a:t>
+            </a:r>
+          </a:p>
+          <a:p>
+            <a:r>
+              <a:rPr lang="zh-CN" dirty="0"/>
+              <a:t/>
+            </a:r>
+          </a:p>
+          <a:p>
+            <a:r>
+              <a:rPr lang="zh-CN" dirty="0"/>
+              <a:t>学习目标：掌握位置 / 关键字 / 默认值三种写法；理解传列表会改到原列表</a:t>
+            </a:r>
+          </a:p>
+          <a:p>
+            <a:r>
+              <a:rPr lang="zh-CN" dirty="0"/>
+              <a:t/>
+            </a:r>
+          </a:p>
+          <a:p>
+            <a:r>
+              <a:rPr lang="zh-CN" dirty="0"/>
+              <a:t>课堂实操（40 分钟，不看答案）：</a:t>
+            </a:r>
+          </a:p>
+          <a:p>
+            <a:r>
+              <a:rPr lang="zh-CN" dirty="0"/>
+              <a:t>· 同一函数用三种方式调用并比较</a:t>
+            </a:r>
+          </a:p>
+          <a:p>
+            <a:r>
+              <a:rPr lang="zh-CN" dirty="0"/>
+              <a:t>· ★ A/B 对照：函数改列表 vs 返回新列表</a:t>
+            </a:r>
+          </a:p>
+          <a:p>
+            <a:r>
+              <a:rPr lang="zh-CN" dirty="0"/>
+              <a:t>· ★ B/C/D 对照：传列表 / 传切片 / 传副本</a:t>
+            </a:r>
+          </a:p>
+          <a:p>
+            <a:r>
+              <a:rPr lang="zh-CN" dirty="0"/>
+              <a:t/>
+            </a:r>
+          </a:p>
+          <a:p>
+            <a:r>
+              <a:rPr lang="zh-CN" dirty="0"/>
+              <a:t>课后作业：</a:t>
+            </a:r>
+          </a:p>
+          <a:p>
+            <a:r>
+              <a:rPr lang="zh-CN" dirty="0"/>
+              <a:t>· 完成题库 L3-3（改与不改）</a:t>
+            </a:r>
+          </a:p>
+          <a:p>
+            <a:r>
+              <a:rPr lang="zh-CN" dirty="0"/>
+              <a:t/>
+            </a:r>
+          </a:p>
+          <a:p>
+            <a:r>
+              <a:rPr lang="zh-CN" dirty="0"/>
+              <a:t>节奏：讲 20 分钟 → 学员自己敲 40 分钟（不看答案）→ 对讲评自查 20 分钟 → 写作业 10 分钟。</a:t>
+            </a:r>
+          </a:p>
+        </p:txBody>
+      </p:sp>
+    </p:spTree>
+  </p:cSld>
+  <p:clrMapOvr>
+    <a:masterClrMapping/>
+  </p:clrMapOvr>
+</p:notes>
+</file>
+
+<file path=ppt/notesSlides/notesSlide5.xml><?xml version="1.0" encoding="utf-8"?>
+<p:notes xmlns:a="http://schemas.openxmlformats.org/drawingml/2006/main" xmlns:p="http://schemas.openxmlformats.org/presentationml/2006/main" xmlns:r="http://schemas.openxmlformats.org/officeDocument/2006/relationships">
+  <p:cSld>
+    <p:spTree>
+      <p:nvGrpSpPr>
+        <p:cNvPr id="1" name=""/>
+        <p:cNvGrpSpPr/>
+        <p:nvPr/>
+      </p:nvGrpSpPr>
+      <p:grpSpPr>
+        <a:xfrm>
+          <a:off x="0" y="0"/>
+          <a:ext cx="0" cy="0"/>
+          <a:chOff x="0" y="0"/>
+          <a:chExt cx="0" cy="0"/>
+        </a:xfrm>
+      </p:grpSpPr>
+      <p:sp>
+        <p:nvSpPr>
+          <p:cNvPr id="2" name="讲课提示"/>
+          <p:cNvSpPr txBox="1"/>
+          <p:nvPr/>
+        </p:nvSpPr>
+        <p:spPr>
+          <a:xfrm>
+            <a:off x="457200" y="457200"/>
+            <a:ext cx="6858000" cy="4800600"/>
+          </a:xfrm>
+          <a:prstGeom prst="rect">
+            <a:avLst/>
+          </a:prstGeom>
+        </p:spPr>
+        <p:txBody>
+          <a:bodyPr wrap="square"/>
+          <a:lstStyle/>
+          <a:p>
+            <a:r>
+              <a:rPr lang="zh-CN" dirty="0"/>
+              <a:t>第 34 节 · 核心知识点：三种参数写法与★ 参数传递的副本语义</a:t>
+            </a:r>
+          </a:p>
+          <a:p>
+            <a:r>
+              <a:rPr lang="zh-CN" dirty="0"/>
+              <a:t/>
+            </a:r>
+          </a:p>
+          <a:p>
+            <a:r>
+              <a:rPr lang="zh-CN" dirty="0"/>
+              <a:t>讲这一页时：先让学生说出上节课的结论，再逐块讲要点。</a:t>
+            </a:r>
+          </a:p>
+          <a:p>
+            <a:r>
+              <a:rPr lang="zh-CN" dirty="0"/>
+              <a:t>每讲完一块，问一句「这一步如果写错了，报错会长什么样？」——把错误提前讲。</a:t>
+            </a:r>
+          </a:p>
+          <a:p>
+            <a:r>
+              <a:rPr lang="zh-CN" dirty="0"/>
+              <a:t/>
+            </a:r>
+          </a:p>
+          <a:p>
+            <a:r>
+              <a:rPr lang="zh-CN" dirty="0"/>
+              <a:t>本节目标：掌握位置 / 关键字 / 默认值三种写法；理解传列表会改到原列表</a:t>
+            </a:r>
+          </a:p>
+          <a:p>
+            <a:r>
+              <a:rPr lang="zh-CN" dirty="0"/>
+              <a:t/>
+            </a:r>
+          </a:p>
+          <a:p>
+            <a:r>
+              <a:rPr lang="zh-CN" dirty="0"/>
+              <a:t>看不到懂的地方，回讲义对应小节读一遍，再回来对着这页复述一次——能讲出来才算真懂。</a:t>
+            </a:r>
+          </a:p>
+        </p:txBody>
+      </p:sp>
+    </p:spTree>
+  </p:cSld>
+  <p:clrMapOvr>
+    <a:masterClrMapping/>
+  </p:clrMapOvr>
+</p:notes>
+</file>
+
+<file path=ppt/notesSlides/notesSlide6.xml><?xml version="1.0" encoding="utf-8"?>
+<p:notes xmlns:a="http://schemas.openxmlformats.org/drawingml/2006/main" xmlns:p="http://schemas.openxmlformats.org/presentationml/2006/main" xmlns:r="http://schemas.openxmlformats.org/officeDocument/2006/relationships">
+  <p:cSld>
+    <p:spTree>
+      <p:nvGrpSpPr>
+        <p:cNvPr id="1" name=""/>
+        <p:cNvGrpSpPr/>
+        <p:nvPr/>
+      </p:nvGrpSpPr>
+      <p:grpSpPr>
+        <a:xfrm>
+          <a:off x="0" y="0"/>
+          <a:ext cx="0" cy="0"/>
+          <a:chOff x="0" y="0"/>
+          <a:chExt cx="0" cy="0"/>
+        </a:xfrm>
+      </p:grpSpPr>
+      <p:sp>
+        <p:nvSpPr>
+          <p:cNvPr id="2" name="讲课提示"/>
+          <p:cNvSpPr txBox="1"/>
+          <p:nvPr/>
+        </p:nvSpPr>
+        <p:spPr>
+          <a:xfrm>
+            <a:off x="457200" y="457200"/>
+            <a:ext cx="6858000" cy="4800600"/>
+          </a:xfrm>
+          <a:prstGeom prst="rect">
+            <a:avLst/>
+          </a:prstGeom>
+        </p:spPr>
+        <p:txBody>
+          <a:bodyPr wrap="square"/>
+          <a:lstStyle/>
+          <a:p>
+            <a:r>
+              <a:rPr lang="zh-CN" dirty="0"/>
+              <a:t>第 35 节 · 作用域与函数是一等公民</a:t>
+            </a:r>
+          </a:p>
+          <a:p>
+            <a:r>
+              <a:rPr lang="zh-CN" dirty="0"/>
+              <a:t>单元 7 · 函数 · W7–W8</a:t>
+            </a:r>
+          </a:p>
+          <a:p>
+            <a:r>
+              <a:rPr lang="zh-CN" dirty="0"/>
+              <a:t/>
+            </a:r>
+          </a:p>
+          <a:p>
+            <a:r>
+              <a:rPr lang="zh-CN" dirty="0"/>
+              <a:t>学习目标：理解局部与全局，知道函数能赋值给变量、能传进别的函数</a:t>
+            </a:r>
+          </a:p>
+          <a:p>
+            <a:r>
+              <a:rPr lang="zh-CN" dirty="0"/>
+              <a:t/>
+            </a:r>
+          </a:p>
+          <a:p>
+            <a:r>
+              <a:rPr lang="zh-CN" dirty="0"/>
+              <a:t>课堂实操（40 分钟，不看答案）：</a:t>
+            </a:r>
+          </a:p>
+          <a:p>
+            <a:r>
+              <a:rPr lang="zh-CN" dirty="0"/>
+              <a:t>· 现场触发一次 NameError</a:t>
+            </a:r>
+          </a:p>
+          <a:p>
+            <a:r>
+              <a:rPr lang="zh-CN" dirty="0"/>
+              <a:t>· 把函数赋给变量再调用</a:t>
+            </a:r>
+          </a:p>
+          <a:p>
+            <a:r>
+              <a:rPr lang="zh-CN" dirty="0"/>
+              <a:t/>
+            </a:r>
+          </a:p>
+          <a:p>
+            <a:r>
+              <a:rPr lang="zh-CN" dirty="0"/>
+              <a:t>课后作业：</a:t>
+            </a:r>
+          </a:p>
+          <a:p>
+            <a:r>
+              <a:rPr lang="zh-CN" dirty="0"/>
+              <a:t>· 完成动手练习 7-3 ~ 7-4</a:t>
+            </a:r>
+          </a:p>
+          <a:p>
+            <a:r>
+              <a:rPr lang="zh-CN" dirty="0"/>
+              <a:t/>
+            </a:r>
+          </a:p>
+          <a:p>
+            <a:r>
+              <a:rPr lang="zh-CN" dirty="0"/>
+              <a:t>节奏：讲 20 分钟 → 学员自己敲 40 分钟（不看答案）→ 对讲评自查 20 分钟 → 写作业 10 分钟。</a:t>
+            </a:r>
+          </a:p>
+        </p:txBody>
+      </p:sp>
+    </p:spTree>
+  </p:cSld>
+  <p:clrMapOvr>
+    <a:masterClrMapping/>
+  </p:clrMapOvr>
+</p:notes>
+</file>
+
+<file path=ppt/notesSlides/notesSlide7.xml><?xml version="1.0" encoding="utf-8"?>
+<p:notes xmlns:a="http://schemas.openxmlformats.org/drawingml/2006/main" xmlns:p="http://schemas.openxmlformats.org/presentationml/2006/main" xmlns:r="http://schemas.openxmlformats.org/officeDocument/2006/relationships">
+  <p:cSld>
+    <p:spTree>
+      <p:nvGrpSpPr>
+        <p:cNvPr id="1" name=""/>
+        <p:cNvGrpSpPr/>
+        <p:nvPr/>
+      </p:nvGrpSpPr>
+      <p:grpSpPr>
+        <a:xfrm>
+          <a:off x="0" y="0"/>
+          <a:ext cx="0" cy="0"/>
+          <a:chOff x="0" y="0"/>
+          <a:chExt cx="0" cy="0"/>
+        </a:xfrm>
+      </p:grpSpPr>
+      <p:sp>
+        <p:nvSpPr>
+          <p:cNvPr id="2" name="讲课提示"/>
+          <p:cNvSpPr txBox="1"/>
+          <p:nvPr/>
+        </p:nvSpPr>
+        <p:spPr>
+          <a:xfrm>
+            <a:off x="457200" y="457200"/>
+            <a:ext cx="6858000" cy="4800600"/>
+          </a:xfrm>
+          <a:prstGeom prst="rect">
+            <a:avLst/>
+          </a:prstGeom>
+        </p:spPr>
+        <p:txBody>
+          <a:bodyPr wrap="square"/>
+          <a:lstStyle/>
+          <a:p>
+            <a:r>
+              <a:rPr lang="zh-CN" dirty="0"/>
+              <a:t>第 35 节 · 核心知识点：作用域与函数是一等公民</a:t>
+            </a:r>
+          </a:p>
+          <a:p>
+            <a:r>
+              <a:rPr lang="zh-CN" dirty="0"/>
+              <a:t/>
+            </a:r>
+          </a:p>
+          <a:p>
+            <a:r>
+              <a:rPr lang="zh-CN" dirty="0"/>
+              <a:t>讲这一页时：先让学生说出上节课的结论，再逐块讲要点。</a:t>
+            </a:r>
+          </a:p>
+          <a:p>
+            <a:r>
+              <a:rPr lang="zh-CN" dirty="0"/>
+              <a:t>每讲完一块，问一句「这一步如果写错了，报错会长什么样？」——把错误提前讲。</a:t>
+            </a:r>
+          </a:p>
+          <a:p>
+            <a:r>
+              <a:rPr lang="zh-CN" dirty="0"/>
+              <a:t/>
+            </a:r>
+          </a:p>
+          <a:p>
+            <a:r>
+              <a:rPr lang="zh-CN" dirty="0"/>
+              <a:t>本节目标：理解局部与全局，知道函数能赋值给变量、能传进别的函数</a:t>
+            </a:r>
+          </a:p>
+          <a:p>
+            <a:r>
+              <a:rPr lang="zh-CN" dirty="0"/>
+              <a:t/>
+            </a:r>
+          </a:p>
+          <a:p>
+            <a:r>
+              <a:rPr lang="zh-CN" dirty="0"/>
+              <a:t>看不到懂的地方，回讲义对应小节读一遍，再回来对着这页复述一次——能讲出来才算真懂。</a:t>
+            </a:r>
+          </a:p>
+        </p:txBody>
+      </p:sp>
+    </p:spTree>
+  </p:cSld>
+  <p:clrMapOvr>
+    <a:masterClrMapping/>
+  </p:clrMapOvr>
+</p:notes>
+</file>
+
+<file path=ppt/notesSlides/notesSlide8.xml><?xml version="1.0" encoding="utf-8"?>
+<p:notes xmlns:a="http://schemas.openxmlformats.org/drawingml/2006/main" xmlns:p="http://schemas.openxmlformats.org/presentationml/2006/main" xmlns:r="http://schemas.openxmlformats.org/officeDocument/2006/relationships">
+  <p:cSld>
+    <p:spTree>
+      <p:nvGrpSpPr>
+        <p:cNvPr id="1" name=""/>
+        <p:cNvGrpSpPr/>
+        <p:nvPr/>
+      </p:nvGrpSpPr>
+      <p:grpSpPr>
+        <a:xfrm>
+          <a:off x="0" y="0"/>
+          <a:ext cx="0" cy="0"/>
+          <a:chOff x="0" y="0"/>
+          <a:chExt cx="0" cy="0"/>
+        </a:xfrm>
+      </p:grpSpPr>
+      <p:sp>
+        <p:nvSpPr>
+          <p:cNvPr id="2" name="讲课提示"/>
+          <p:cNvSpPr txBox="1"/>
+          <p:nvPr/>
+        </p:nvSpPr>
+        <p:spPr>
+          <a:xfrm>
+            <a:off x="457200" y="457200"/>
+            <a:ext cx="6858000" cy="4800600"/>
+          </a:xfrm>
+          <a:prstGeom prst="rect">
+            <a:avLst/>
+          </a:prstGeom>
+        </p:spPr>
+        <p:txBody>
+          <a:bodyPr wrap="square"/>
+          <a:lstStyle/>
+          <a:p>
+            <a:r>
+              <a:rPr lang="zh-CN" dirty="0"/>
+              <a:t>第 36 节 · 七个示例串讲与拆模块</a:t>
+            </a:r>
+          </a:p>
+          <a:p>
+            <a:r>
+              <a:rPr lang="zh-CN" dirty="0"/>
+              <a:t>单元 7 · 函数 · W7–W8</a:t>
+            </a:r>
+          </a:p>
+          <a:p>
+            <a:r>
+              <a:rPr lang="zh-CN" dirty="0"/>
+              <a:t/>
+            </a:r>
+          </a:p>
+          <a:p>
+            <a:r>
+              <a:rPr lang="zh-CN" dirty="0"/>
+              <a:t>学习目标：把课堂示例改成自己的模块，理解导入的四种写法</a:t>
+            </a:r>
+          </a:p>
+          <a:p>
+            <a:r>
+              <a:rPr lang="zh-CN" dirty="0"/>
+              <a:t/>
+            </a:r>
+          </a:p>
+          <a:p>
+            <a:r>
+              <a:rPr lang="zh-CN" dirty="0"/>
+              <a:t>课堂实操（40 分钟，不看答案）：</a:t>
+            </a:r>
+          </a:p>
+          <a:p>
+            <a:r>
+              <a:rPr lang="zh-CN" dirty="0"/>
+              <a:t>· 把三个函数拆到两个模块里并 import</a:t>
+            </a:r>
+          </a:p>
+          <a:p>
+            <a:r>
+              <a:rPr lang="zh-CN" dirty="0"/>
+              <a:t>· 对照示例讲清每段的意图</a:t>
+            </a:r>
+          </a:p>
+          <a:p>
+            <a:r>
+              <a:rPr lang="zh-CN" dirty="0"/>
+              <a:t/>
+            </a:r>
+          </a:p>
+          <a:p>
+            <a:r>
+              <a:rPr lang="zh-CN" dirty="0"/>
+              <a:t>课后作业：</a:t>
+            </a:r>
+          </a:p>
+          <a:p>
+            <a:r>
+              <a:rPr lang="zh-CN" dirty="0"/>
+              <a:t>· 完成动手练习进阶档 7-5 ~ 7-8</a:t>
+            </a:r>
+          </a:p>
+          <a:p>
+            <a:r>
+              <a:rPr lang="zh-CN" dirty="0"/>
+              <a:t/>
+            </a:r>
+          </a:p>
+          <a:p>
+            <a:r>
+              <a:rPr lang="zh-CN" dirty="0"/>
+              <a:t>节奏：讲 20 分钟 → 学员自己敲 40 分钟（不看答案）→ 对讲评自查 20 分钟 → 写作业 10 分钟。</a:t>
+            </a:r>
+          </a:p>
+        </p:txBody>
+      </p:sp>
+    </p:spTree>
+  </p:cSld>
+  <p:clrMapOvr>
+    <a:masterClrMapping/>
+  </p:clrMapOvr>
+</p:notes>
+</file>
+
+<file path=ppt/notesSlides/notesSlide9.xml><?xml version="1.0" encoding="utf-8"?>
+<p:notes xmlns:a="http://schemas.openxmlformats.org/drawingml/2006/main" xmlns:p="http://schemas.openxmlformats.org/presentationml/2006/main" xmlns:r="http://schemas.openxmlformats.org/officeDocument/2006/relationships">
+  <p:cSld>
+    <p:spTree>
+      <p:nvGrpSpPr>
+        <p:cNvPr id="1" name=""/>
+        <p:cNvGrpSpPr/>
+        <p:nvPr/>
+      </p:nvGrpSpPr>
+      <p:grpSpPr>
+        <a:xfrm>
+          <a:off x="0" y="0"/>
+          <a:ext cx="0" cy="0"/>
+          <a:chOff x="0" y="0"/>
+          <a:chExt cx="0" cy="0"/>
+        </a:xfrm>
+      </p:grpSpPr>
+      <p:sp>
+        <p:nvSpPr>
+          <p:cNvPr id="2" name="讲课提示"/>
+          <p:cNvSpPr txBox="1"/>
+          <p:nvPr/>
+        </p:nvSpPr>
+        <p:spPr>
+          <a:xfrm>
+            <a:off x="457200" y="457200"/>
+            <a:ext cx="6858000" cy="4800600"/>
+          </a:xfrm>
+          <a:prstGeom prst="rect">
+            <a:avLst/>
+          </a:prstGeom>
+        </p:spPr>
+        <p:txBody>
+          <a:bodyPr wrap="square"/>
+          <a:lstStyle/>
+          <a:p>
+            <a:r>
+              <a:rPr lang="zh-CN" dirty="0"/>
+              <a:t>第 36 节 · 核心知识点：七个示例串讲与拆模块</a:t>
+            </a:r>
+          </a:p>
+          <a:p>
+            <a:r>
+              <a:rPr lang="zh-CN" dirty="0"/>
+              <a:t/>
+            </a:r>
+          </a:p>
+          <a:p>
+            <a:r>
+              <a:rPr lang="zh-CN" dirty="0"/>
+              <a:t>讲这一页时：先让学生说出上节课的结论，再逐块讲要点。</a:t>
+            </a:r>
+          </a:p>
+          <a:p>
+            <a:r>
+              <a:rPr lang="zh-CN" dirty="0"/>
+              <a:t>每讲完一块，问一句「这一步如果写错了，报错会长什么样？」——把错误提前讲。</a:t>
+            </a:r>
+          </a:p>
+          <a:p>
+            <a:r>
+              <a:rPr lang="zh-CN" dirty="0"/>
+              <a:t/>
+            </a:r>
+          </a:p>
+          <a:p>
+            <a:r>
+              <a:rPr lang="zh-CN" dirty="0"/>
+              <a:t>本节目标：把课堂示例改成自己的模块，理解导入的四种写法</a:t>
+            </a:r>
+          </a:p>
+          <a:p>
+            <a:r>
+              <a:rPr lang="zh-CN" dirty="0"/>
+              <a:t/>
+            </a:r>
+          </a:p>
+          <a:p>
+            <a:r>
+              <a:rPr lang="zh-CN" dirty="0"/>
+              <a:t>看不到懂的地方，回讲义对应小节读一遍，再回来对着这页复述一次——能讲出来才算真懂。</a:t>
+            </a:r>
+          </a:p>
+        </p:txBody>
+      </p:sp>
+    </p:spTree>
+  </p:cSld>
+  <p:clrMapOvr>
+    <a:masterClrMapping/>
+  </p:clrMapOvr>
+</p:notes>
 </file>
 
 <file path=ppt/slideLayouts/slideLayout1.xml><?xml version="1.0" encoding="utf-8"?>
